--- a/materials/lectures/17-kruskal/slides.pptx
+++ b/materials/lectures/17-kruskal/slides.pptx
@@ -7,7 +7,7 @@
     <p:sldMasterId id="2147483668" r:id="rId3"/>
   </p:sldMasterIdLst>
   <p:notesMasterIdLst>
-    <p:notesMasterId r:id="rId47"/>
+    <p:notesMasterId r:id="rId50"/>
   </p:notesMasterIdLst>
   <p:sldIdLst>
     <p:sldId id="256" r:id="rId4"/>
@@ -17,83 +17,74 @@
     <p:sldId id="896" r:id="rId8"/>
     <p:sldId id="827" r:id="rId9"/>
     <p:sldId id="898" r:id="rId10"/>
-    <p:sldId id="913" r:id="rId11"/>
-    <p:sldId id="897" r:id="rId12"/>
-    <p:sldId id="914" r:id="rId13"/>
-    <p:sldId id="912" r:id="rId14"/>
-    <p:sldId id="915" r:id="rId15"/>
-    <p:sldId id="916" r:id="rId16"/>
-    <p:sldId id="917" r:id="rId17"/>
-    <p:sldId id="918" r:id="rId18"/>
-    <p:sldId id="919" r:id="rId19"/>
-    <p:sldId id="920" r:id="rId20"/>
-    <p:sldId id="921" r:id="rId21"/>
-    <p:sldId id="826" r:id="rId22"/>
-    <p:sldId id="901" r:id="rId23"/>
-    <p:sldId id="902" r:id="rId24"/>
-    <p:sldId id="903" r:id="rId25"/>
-    <p:sldId id="904" r:id="rId26"/>
-    <p:sldId id="905" r:id="rId27"/>
-    <p:sldId id="906" r:id="rId28"/>
-    <p:sldId id="907" r:id="rId29"/>
-    <p:sldId id="911" r:id="rId30"/>
-    <p:sldId id="406" r:id="rId31"/>
-    <p:sldId id="407" r:id="rId32"/>
-    <p:sldId id="408" r:id="rId33"/>
-    <p:sldId id="409" r:id="rId34"/>
-    <p:sldId id="410" r:id="rId35"/>
-    <p:sldId id="411" r:id="rId36"/>
-    <p:sldId id="412" r:id="rId37"/>
-    <p:sldId id="413" r:id="rId38"/>
-    <p:sldId id="414" r:id="rId39"/>
-    <p:sldId id="420" r:id="rId40"/>
-    <p:sldId id="415" r:id="rId41"/>
-    <p:sldId id="416" r:id="rId42"/>
-    <p:sldId id="417" r:id="rId43"/>
-    <p:sldId id="418" r:id="rId44"/>
-    <p:sldId id="908" r:id="rId45"/>
-    <p:sldId id="900" r:id="rId46"/>
+    <p:sldId id="922" r:id="rId11"/>
+    <p:sldId id="913" r:id="rId12"/>
+    <p:sldId id="897" r:id="rId13"/>
+    <p:sldId id="923" r:id="rId14"/>
+    <p:sldId id="914" r:id="rId15"/>
+    <p:sldId id="912" r:id="rId16"/>
+    <p:sldId id="915" r:id="rId17"/>
+    <p:sldId id="916" r:id="rId18"/>
+    <p:sldId id="917" r:id="rId19"/>
+    <p:sldId id="918" r:id="rId20"/>
+    <p:sldId id="919" r:id="rId21"/>
+    <p:sldId id="920" r:id="rId22"/>
+    <p:sldId id="921" r:id="rId23"/>
+    <p:sldId id="826" r:id="rId24"/>
+    <p:sldId id="901" r:id="rId25"/>
+    <p:sldId id="924" r:id="rId26"/>
+    <p:sldId id="902" r:id="rId27"/>
+    <p:sldId id="903" r:id="rId28"/>
+    <p:sldId id="904" r:id="rId29"/>
+    <p:sldId id="905" r:id="rId30"/>
+    <p:sldId id="906" r:id="rId31"/>
+    <p:sldId id="907" r:id="rId32"/>
+    <p:sldId id="911" r:id="rId33"/>
+    <p:sldId id="406" r:id="rId34"/>
+    <p:sldId id="407" r:id="rId35"/>
+    <p:sldId id="408" r:id="rId36"/>
+    <p:sldId id="409" r:id="rId37"/>
+    <p:sldId id="410" r:id="rId38"/>
+    <p:sldId id="411" r:id="rId39"/>
+    <p:sldId id="412" r:id="rId40"/>
+    <p:sldId id="413" r:id="rId41"/>
+    <p:sldId id="414" r:id="rId42"/>
+    <p:sldId id="420" r:id="rId43"/>
+    <p:sldId id="415" r:id="rId44"/>
+    <p:sldId id="416" r:id="rId45"/>
+    <p:sldId id="417" r:id="rId46"/>
+    <p:sldId id="418" r:id="rId47"/>
+    <p:sldId id="908" r:id="rId48"/>
+    <p:sldId id="900" r:id="rId49"/>
   </p:sldIdLst>
   <p:sldSz cx="12192000" cy="6858000"/>
   <p:notesSz cx="6858000" cy="9144000"/>
   <p:embeddedFontLst>
     <p:embeddedFont>
       <p:font typeface="Bookman Old Style" panose="02050604050505020204" pitchFamily="18" charset="0"/>
-      <p:regular r:id="rId48"/>
-      <p:bold r:id="rId49"/>
-      <p:italic r:id="rId50"/>
-      <p:boldItalic r:id="rId51"/>
-    </p:embeddedFont>
-    <p:embeddedFont>
-      <p:font typeface="Calibri" panose="020F0502020204030204" pitchFamily="34" charset="0"/>
-      <p:regular r:id="rId52"/>
-      <p:bold r:id="rId53"/>
-      <p:italic r:id="rId54"/>
-      <p:boldItalic r:id="rId55"/>
-    </p:embeddedFont>
-    <p:embeddedFont>
-      <p:font typeface="Calibri Light" panose="020F0302020204030204" pitchFamily="34" charset="0"/>
-      <p:regular r:id="rId56"/>
-      <p:italic r:id="rId57"/>
+      <p:regular r:id="rId51"/>
+      <p:bold r:id="rId52"/>
+      <p:italic r:id="rId53"/>
+      <p:boldItalic r:id="rId54"/>
     </p:embeddedFont>
     <p:embeddedFont>
       <p:font typeface="Cambria Math" panose="02040503050406030204" pitchFamily="18" charset="0"/>
-      <p:regular r:id="rId58"/>
+      <p:regular r:id="rId55"/>
     </p:embeddedFont>
     <p:embeddedFont>
       <p:font typeface="Gill Sans MT" panose="020B0502020104020203" pitchFamily="34" charset="0"/>
-      <p:regular r:id="rId59"/>
-      <p:bold r:id="rId60"/>
-      <p:italic r:id="rId61"/>
-      <p:boldItalic r:id="rId62"/>
+      <p:regular r:id="rId56"/>
+      <p:bold r:id="rId57"/>
+      <p:italic r:id="rId58"/>
+      <p:boldItalic r:id="rId59"/>
     </p:embeddedFont>
     <p:embeddedFont>
       <p:font typeface="Wingdings 3" panose="05040102010807070707" pitchFamily="18" charset="2"/>
-      <p:regular r:id="rId63"/>
+      <p:regular r:id="rId60"/>
     </p:embeddedFont>
   </p:embeddedFontLst>
   <p:custDataLst>
-    <p:tags r:id="rId64"/>
+    <p:tags r:id="rId61"/>
   </p:custDataLst>
   <p:defaultTextStyle>
     <a:defPPr>
@@ -346,7 +337,7 @@
               <a:pPr>
                 <a:defRPr/>
               </a:pPr>
-              <a:t>3/13/2023</a:t>
+              <a:t>3/1/2025</a:t>
             </a:fld>
             <a:endParaRPr lang="en-US"/>
           </a:p>
@@ -1034,7 +1025,7 @@
               <a:pPr>
                 <a:defRPr/>
               </a:pPr>
-              <a:t>3/13/2023</a:t>
+              <a:t>3/1/2025</a:t>
             </a:fld>
             <a:endParaRPr lang="en-US"/>
           </a:p>
@@ -1278,7 +1269,7 @@
           <a:p>
             <a:fld id="{344494C4-6097-4BA9-B81C-8FE8D10E85BA}" type="datetimeFigureOut">
               <a:rPr lang="en-US" smtClean="0"/>
-              <a:t>3/13/2023</a:t>
+              <a:t>3/1/2025</a:t>
             </a:fld>
             <a:endParaRPr lang="en-US"/>
           </a:p>
@@ -1523,7 +1514,7 @@
           <a:p>
             <a:fld id="{344494C4-6097-4BA9-B81C-8FE8D10E85BA}" type="datetimeFigureOut">
               <a:rPr lang="en-US" smtClean="0"/>
-              <a:t>3/13/2023</a:t>
+              <a:t>3/1/2025</a:t>
             </a:fld>
             <a:endParaRPr lang="en-US"/>
           </a:p>
@@ -1903,7 +1894,7 @@
           <a:p>
             <a:fld id="{344494C4-6097-4BA9-B81C-8FE8D10E85BA}" type="datetimeFigureOut">
               <a:rPr lang="en-US" smtClean="0"/>
-              <a:t>3/13/2023</a:t>
+              <a:t>3/1/2025</a:t>
             </a:fld>
             <a:endParaRPr lang="en-US"/>
           </a:p>
@@ -2036,7 +2027,7 @@
           <a:p>
             <a:fld id="{344494C4-6097-4BA9-B81C-8FE8D10E85BA}" type="datetimeFigureOut">
               <a:rPr lang="en-US" smtClean="0"/>
-              <a:t>3/13/2023</a:t>
+              <a:t>3/1/2025</a:t>
             </a:fld>
             <a:endParaRPr lang="en-US"/>
           </a:p>
@@ -2147,7 +2138,7 @@
           <a:p>
             <a:fld id="{344494C4-6097-4BA9-B81C-8FE8D10E85BA}" type="datetimeFigureOut">
               <a:rPr lang="en-US" smtClean="0"/>
-              <a:t>3/13/2023</a:t>
+              <a:t>3/1/2025</a:t>
             </a:fld>
             <a:endParaRPr lang="en-US"/>
           </a:p>
@@ -2438,7 +2429,7 @@
           <a:p>
             <a:fld id="{344494C4-6097-4BA9-B81C-8FE8D10E85BA}" type="datetimeFigureOut">
               <a:rPr lang="en-US" smtClean="0"/>
-              <a:t>3/13/2023</a:t>
+              <a:t>3/1/2025</a:t>
             </a:fld>
             <a:endParaRPr lang="en-US"/>
           </a:p>
@@ -2706,7 +2697,7 @@
           <a:p>
             <a:fld id="{344494C4-6097-4BA9-B81C-8FE8D10E85BA}" type="datetimeFigureOut">
               <a:rPr lang="en-US" smtClean="0"/>
-              <a:t>3/13/2023</a:t>
+              <a:t>3/1/2025</a:t>
             </a:fld>
             <a:endParaRPr lang="en-US"/>
           </a:p>
@@ -2890,7 +2881,7 @@
           <a:p>
             <a:fld id="{344494C4-6097-4BA9-B81C-8FE8D10E85BA}" type="datetimeFigureOut">
               <a:rPr lang="en-US" smtClean="0"/>
-              <a:t>3/13/2023</a:t>
+              <a:t>3/1/2025</a:t>
             </a:fld>
             <a:endParaRPr lang="en-US"/>
           </a:p>
@@ -3084,7 +3075,7 @@
           <a:p>
             <a:fld id="{344494C4-6097-4BA9-B81C-8FE8D10E85BA}" type="datetimeFigureOut">
               <a:rPr lang="en-US" smtClean="0"/>
-              <a:t>3/13/2023</a:t>
+              <a:t>3/1/2025</a:t>
             </a:fld>
             <a:endParaRPr lang="en-US"/>
           </a:p>
@@ -3282,7 +3273,7 @@
           <a:p>
             <a:fld id="{7BF7D500-1223-4445-9EB2-2C72C770F9EB}" type="datetimeFigureOut">
               <a:rPr lang="en-US" smtClean="0"/>
-              <a:t>3/13/2023</a:t>
+              <a:t>3/1/2025</a:t>
             </a:fld>
             <a:endParaRPr lang="en-US"/>
           </a:p>
@@ -3465,7 +3456,7 @@
               <a:pPr>
                 <a:defRPr/>
               </a:pPr>
-              <a:t>3/13/2023</a:t>
+              <a:t>3/1/2025</a:t>
             </a:fld>
             <a:endParaRPr lang="en-US"/>
           </a:p>
@@ -3619,7 +3610,7 @@
           <a:p>
             <a:fld id="{7BF7D500-1223-4445-9EB2-2C72C770F9EB}" type="datetimeFigureOut">
               <a:rPr lang="en-US" smtClean="0"/>
-              <a:t>3/13/2023</a:t>
+              <a:t>3/1/2025</a:t>
             </a:fld>
             <a:endParaRPr lang="en-US"/>
           </a:p>
@@ -3864,7 +3855,7 @@
           <a:p>
             <a:fld id="{7BF7D500-1223-4445-9EB2-2C72C770F9EB}" type="datetimeFigureOut">
               <a:rPr lang="en-US" smtClean="0"/>
-              <a:t>3/13/2023</a:t>
+              <a:t>3/1/2025</a:t>
             </a:fld>
             <a:endParaRPr lang="en-US"/>
           </a:p>
@@ -4093,7 +4084,7 @@
           <a:p>
             <a:fld id="{7BF7D500-1223-4445-9EB2-2C72C770F9EB}" type="datetimeFigureOut">
               <a:rPr lang="en-US" smtClean="0"/>
-              <a:t>3/13/2023</a:t>
+              <a:t>3/1/2025</a:t>
             </a:fld>
             <a:endParaRPr lang="en-US"/>
           </a:p>
@@ -4457,7 +4448,7 @@
           <a:p>
             <a:fld id="{7BF7D500-1223-4445-9EB2-2C72C770F9EB}" type="datetimeFigureOut">
               <a:rPr lang="en-US" smtClean="0"/>
-              <a:t>3/13/2023</a:t>
+              <a:t>3/1/2025</a:t>
             </a:fld>
             <a:endParaRPr lang="en-US"/>
           </a:p>
@@ -4574,7 +4565,7 @@
           <a:p>
             <a:fld id="{7BF7D500-1223-4445-9EB2-2C72C770F9EB}" type="datetimeFigureOut">
               <a:rPr lang="en-US" smtClean="0"/>
-              <a:t>3/13/2023</a:t>
+              <a:t>3/1/2025</a:t>
             </a:fld>
             <a:endParaRPr lang="en-US"/>
           </a:p>
@@ -4669,7 +4660,7 @@
           <a:p>
             <a:fld id="{7BF7D500-1223-4445-9EB2-2C72C770F9EB}" type="datetimeFigureOut">
               <a:rPr lang="en-US" smtClean="0"/>
-              <a:t>3/13/2023</a:t>
+              <a:t>3/1/2025</a:t>
             </a:fld>
             <a:endParaRPr lang="en-US"/>
           </a:p>
@@ -4944,7 +4935,7 @@
           <a:p>
             <a:fld id="{7BF7D500-1223-4445-9EB2-2C72C770F9EB}" type="datetimeFigureOut">
               <a:rPr lang="en-US" smtClean="0"/>
-              <a:t>3/13/2023</a:t>
+              <a:t>3/1/2025</a:t>
             </a:fld>
             <a:endParaRPr lang="en-US"/>
           </a:p>
@@ -5196,7 +5187,7 @@
           <a:p>
             <a:fld id="{7BF7D500-1223-4445-9EB2-2C72C770F9EB}" type="datetimeFigureOut">
               <a:rPr lang="en-US" smtClean="0"/>
-              <a:t>3/13/2023</a:t>
+              <a:t>3/1/2025</a:t>
             </a:fld>
             <a:endParaRPr lang="en-US"/>
           </a:p>
@@ -5364,7 +5355,7 @@
           <a:p>
             <a:fld id="{7BF7D500-1223-4445-9EB2-2C72C770F9EB}" type="datetimeFigureOut">
               <a:rPr lang="en-US" smtClean="0"/>
-              <a:t>3/13/2023</a:t>
+              <a:t>3/1/2025</a:t>
             </a:fld>
             <a:endParaRPr lang="en-US"/>
           </a:p>
@@ -5542,7 +5533,7 @@
           <a:p>
             <a:fld id="{7BF7D500-1223-4445-9EB2-2C72C770F9EB}" type="datetimeFigureOut">
               <a:rPr lang="en-US" smtClean="0"/>
-              <a:t>3/13/2023</a:t>
+              <a:t>3/1/2025</a:t>
             </a:fld>
             <a:endParaRPr lang="en-US"/>
           </a:p>
@@ -5786,7 +5777,7 @@
               <a:pPr>
                 <a:defRPr/>
               </a:pPr>
-              <a:t>3/13/2023</a:t>
+              <a:t>3/1/2025</a:t>
             </a:fld>
             <a:endParaRPr lang="en-US"/>
           </a:p>
@@ -6136,7 +6127,7 @@
               <a:pPr>
                 <a:defRPr/>
               </a:pPr>
-              <a:t>3/13/2023</a:t>
+              <a:t>3/1/2025</a:t>
             </a:fld>
             <a:endParaRPr lang="en-US"/>
           </a:p>
@@ -6300,7 +6291,7 @@
               <a:pPr>
                 <a:defRPr/>
               </a:pPr>
-              <a:t>3/13/2023</a:t>
+              <a:t>3/1/2025</a:t>
             </a:fld>
             <a:endParaRPr lang="en-US"/>
           </a:p>
@@ -6391,7 +6382,7 @@
               <a:pPr>
                 <a:defRPr/>
               </a:pPr>
-              <a:t>3/13/2023</a:t>
+              <a:t>3/1/2025</a:t>
             </a:fld>
             <a:endParaRPr lang="en-US"/>
           </a:p>
@@ -6500,7 +6491,7 @@
               <a:pPr>
                 <a:defRPr/>
               </a:pPr>
-              <a:t>3/13/2023</a:t>
+              <a:t>3/1/2025</a:t>
             </a:fld>
             <a:endParaRPr lang="en-US"/>
           </a:p>
@@ -6685,7 +6676,7 @@
           <a:p>
             <a:fld id="{344494C4-6097-4BA9-B81C-8FE8D10E85BA}" type="datetimeFigureOut">
               <a:rPr lang="en-US" smtClean="0"/>
-              <a:t>3/13/2023</a:t>
+              <a:t>3/1/2025</a:t>
             </a:fld>
             <a:endParaRPr lang="en-US"/>
           </a:p>
@@ -6869,7 +6860,7 @@
           <a:p>
             <a:fld id="{344494C4-6097-4BA9-B81C-8FE8D10E85BA}" type="datetimeFigureOut">
               <a:rPr lang="en-US" smtClean="0"/>
-              <a:t>3/13/2023</a:t>
+              <a:t>3/1/2025</a:t>
             </a:fld>
             <a:endParaRPr lang="en-US"/>
           </a:p>
@@ -7118,7 +7109,7 @@
               <a:pPr>
                 <a:defRPr/>
               </a:pPr>
-              <a:t>3/13/2023</a:t>
+              <a:t>3/1/2025</a:t>
             </a:fld>
             <a:endParaRPr lang="en-US"/>
           </a:p>
@@ -8372,7 +8363,7 @@
           <a:p>
             <a:fld id="{7BF7D500-1223-4445-9EB2-2C72C770F9EB}" type="datetimeFigureOut">
               <a:rPr lang="en-US" smtClean="0"/>
-              <a:t>3/13/2023</a:t>
+              <a:t>3/1/2025</a:t>
             </a:fld>
             <a:endParaRPr lang="en-US"/>
           </a:p>
@@ -9018,6 +9009,714 @@
           <p:cNvPr id="2" name="Title 1">
             <a:extLst>
               <a:ext uri="{FF2B5EF4-FFF2-40B4-BE49-F238E27FC236}">
+                <a16:creationId xmlns:a16="http://schemas.microsoft.com/office/drawing/2014/main" id="{BE97B0F8-F5C6-4AB5-9C29-1B5C39ABB6D4}"/>
+              </a:ext>
+            </a:extLst>
+          </p:cNvPr>
+          <p:cNvSpPr>
+            <a:spLocks noGrp="1"/>
+          </p:cNvSpPr>
+          <p:nvPr>
+            <p:ph type="title"/>
+          </p:nvPr>
+        </p:nvSpPr>
+        <p:spPr/>
+        <p:txBody>
+          <a:bodyPr/>
+          <a:lstStyle/>
+          <a:p>
+            <a:r>
+              <a:rPr lang="en-US" dirty="0"/>
+              <a:t>Example</a:t>
+            </a:r>
+          </a:p>
+        </p:txBody>
+      </p:sp>
+      <p:sp>
+        <p:nvSpPr>
+          <p:cNvPr id="3" name="Content Placeholder 2">
+            <a:extLst>
+              <a:ext uri="{FF2B5EF4-FFF2-40B4-BE49-F238E27FC236}">
+                <a16:creationId xmlns:a16="http://schemas.microsoft.com/office/drawing/2014/main" id="{DF020A78-6072-4934-B1BA-9CFEAA6C7E52}"/>
+              </a:ext>
+            </a:extLst>
+          </p:cNvPr>
+          <p:cNvSpPr>
+            <a:spLocks noGrp="1"/>
+          </p:cNvSpPr>
+          <p:nvPr>
+            <p:ph sz="quarter" idx="1"/>
+          </p:nvPr>
+        </p:nvSpPr>
+        <p:spPr/>
+        <p:txBody>
+          <a:bodyPr/>
+          <a:lstStyle/>
+          <a:p>
+            <a:endParaRPr lang="en-US" sz="2000" dirty="0"/>
+          </a:p>
+        </p:txBody>
+      </p:sp>
+      <p:pic>
+        <p:nvPicPr>
+          <p:cNvPr id="4" name="Picture 2">
+            <a:extLst>
+              <a:ext uri="{FF2B5EF4-FFF2-40B4-BE49-F238E27FC236}">
+                <a16:creationId xmlns:a16="http://schemas.microsoft.com/office/drawing/2014/main" id="{00D6EC57-0614-4864-9FE9-E79D6502480C}"/>
+              </a:ext>
+            </a:extLst>
+          </p:cNvPr>
+          <p:cNvPicPr>
+            <a:picLocks noChangeAspect="1" noChangeArrowheads="1"/>
+          </p:cNvPicPr>
+          <p:nvPr/>
+        </p:nvPicPr>
+        <p:blipFill>
+          <a:blip r:embed="rId2">
+            <a:extLst>
+              <a:ext uri="{28A0092B-C50C-407E-A947-70E740481C1C}">
+                <a14:useLocalDpi xmlns:a14="http://schemas.microsoft.com/office/drawing/2010/main" val="0"/>
+              </a:ext>
+            </a:extLst>
+          </a:blip>
+          <a:srcRect/>
+          <a:stretch>
+            <a:fillRect/>
+          </a:stretch>
+        </p:blipFill>
+        <p:spPr bwMode="auto">
+          <a:xfrm>
+            <a:off x="2874861" y="1225659"/>
+            <a:ext cx="6105525" cy="2965341"/>
+          </a:xfrm>
+          <a:prstGeom prst="rect">
+            <a:avLst/>
+          </a:prstGeom>
+          <a:noFill/>
+          <a:ln>
+            <a:noFill/>
+          </a:ln>
+          <a:extLst>
+            <a:ext uri="{909E8E84-426E-40DD-AFC4-6F175D3DCCD1}">
+              <a14:hiddenFill xmlns:a14="http://schemas.microsoft.com/office/drawing/2010/main">
+                <a:solidFill>
+                  <a:schemeClr val="accent1"/>
+                </a:solidFill>
+              </a14:hiddenFill>
+            </a:ext>
+            <a:ext uri="{91240B29-F687-4F45-9708-019B960494DF}">
+              <a14:hiddenLine xmlns:a14="http://schemas.microsoft.com/office/drawing/2010/main" w="9525">
+                <a:solidFill>
+                  <a:schemeClr val="tx1"/>
+                </a:solidFill>
+                <a:miter lim="800000"/>
+                <a:headEnd/>
+                <a:tailEnd/>
+              </a14:hiddenLine>
+            </a:ext>
+          </a:extLst>
+        </p:spPr>
+      </p:pic>
+    </p:spTree>
+    <p:extLst>
+      <p:ext uri="{BB962C8B-B14F-4D97-AF65-F5344CB8AC3E}">
+        <p14:creationId xmlns:p14="http://schemas.microsoft.com/office/powerpoint/2010/main" val="1366709241"/>
+      </p:ext>
+    </p:extLst>
+  </p:cSld>
+  <p:clrMapOvr>
+    <a:masterClrMapping/>
+  </p:clrMapOvr>
+</p:sld>
+</file>
+
+<file path=ppt/slides/slide11.xml><?xml version="1.0" encoding="utf-8"?>
+<p:sld xmlns:a="http://schemas.openxmlformats.org/drawingml/2006/main" xmlns:r="http://schemas.openxmlformats.org/officeDocument/2006/relationships" xmlns:p="http://schemas.openxmlformats.org/presentationml/2006/main">
+  <p:cSld>
+    <p:spTree>
+      <p:nvGrpSpPr>
+        <p:cNvPr id="1" name="">
+          <a:extLst>
+            <a:ext uri="{FF2B5EF4-FFF2-40B4-BE49-F238E27FC236}">
+              <a16:creationId xmlns:a16="http://schemas.microsoft.com/office/drawing/2014/main" id="{577EE78E-3BFE-0F94-31F2-86462CFCDCCF}"/>
+            </a:ext>
+          </a:extLst>
+        </p:cNvPr>
+        <p:cNvGrpSpPr/>
+        <p:nvPr/>
+      </p:nvGrpSpPr>
+      <p:grpSpPr>
+        <a:xfrm>
+          <a:off x="0" y="0"/>
+          <a:ext cx="0" cy="0"/>
+          <a:chOff x="0" y="0"/>
+          <a:chExt cx="0" cy="0"/>
+        </a:xfrm>
+      </p:grpSpPr>
+      <p:sp>
+        <p:nvSpPr>
+          <p:cNvPr id="2" name="Title 1">
+            <a:extLst>
+              <a:ext uri="{FF2B5EF4-FFF2-40B4-BE49-F238E27FC236}">
+                <a16:creationId xmlns:a16="http://schemas.microsoft.com/office/drawing/2014/main" id="{DDC1C45B-D9F7-1E87-D1BF-3AA41E0F6A55}"/>
+              </a:ext>
+            </a:extLst>
+          </p:cNvPr>
+          <p:cNvSpPr>
+            <a:spLocks noGrp="1"/>
+          </p:cNvSpPr>
+          <p:nvPr>
+            <p:ph type="title"/>
+          </p:nvPr>
+        </p:nvSpPr>
+        <p:spPr/>
+        <p:txBody>
+          <a:bodyPr/>
+          <a:lstStyle/>
+          <a:p>
+            <a:r>
+              <a:rPr lang="en-US" dirty="0"/>
+              <a:t>Example</a:t>
+            </a:r>
+          </a:p>
+        </p:txBody>
+      </p:sp>
+      <p:sp>
+        <p:nvSpPr>
+          <p:cNvPr id="3" name="Content Placeholder 2">
+            <a:extLst>
+              <a:ext uri="{FF2B5EF4-FFF2-40B4-BE49-F238E27FC236}">
+                <a16:creationId xmlns:a16="http://schemas.microsoft.com/office/drawing/2014/main" id="{E70FE8CE-9EAE-A92F-C41B-B9E995AAC4A4}"/>
+              </a:ext>
+            </a:extLst>
+          </p:cNvPr>
+          <p:cNvSpPr>
+            <a:spLocks noGrp="1"/>
+          </p:cNvSpPr>
+          <p:nvPr>
+            <p:ph sz="quarter" idx="1"/>
+          </p:nvPr>
+        </p:nvSpPr>
+        <p:spPr/>
+        <p:txBody>
+          <a:bodyPr/>
+          <a:lstStyle/>
+          <a:p>
+            <a:endParaRPr lang="en-US" sz="2000" dirty="0"/>
+          </a:p>
+        </p:txBody>
+      </p:sp>
+      <p:pic>
+        <p:nvPicPr>
+          <p:cNvPr id="4" name="Picture 2">
+            <a:extLst>
+              <a:ext uri="{FF2B5EF4-FFF2-40B4-BE49-F238E27FC236}">
+                <a16:creationId xmlns:a16="http://schemas.microsoft.com/office/drawing/2014/main" id="{08875EE2-CA51-4494-D621-D9E04A5730C5}"/>
+              </a:ext>
+            </a:extLst>
+          </p:cNvPr>
+          <p:cNvPicPr>
+            <a:picLocks noChangeAspect="1" noChangeArrowheads="1"/>
+          </p:cNvPicPr>
+          <p:nvPr/>
+        </p:nvPicPr>
+        <p:blipFill>
+          <a:blip r:embed="rId2">
+            <a:extLst>
+              <a:ext uri="{28A0092B-C50C-407E-A947-70E740481C1C}">
+                <a14:useLocalDpi xmlns:a14="http://schemas.microsoft.com/office/drawing/2010/main" val="0"/>
+              </a:ext>
+            </a:extLst>
+          </a:blip>
+          <a:srcRect/>
+          <a:stretch>
+            <a:fillRect/>
+          </a:stretch>
+        </p:blipFill>
+        <p:spPr bwMode="auto">
+          <a:xfrm>
+            <a:off x="2874861" y="1225659"/>
+            <a:ext cx="6105525" cy="2965341"/>
+          </a:xfrm>
+          <a:prstGeom prst="rect">
+            <a:avLst/>
+          </a:prstGeom>
+          <a:noFill/>
+          <a:ln>
+            <a:noFill/>
+          </a:ln>
+          <a:extLst>
+            <a:ext uri="{909E8E84-426E-40DD-AFC4-6F175D3DCCD1}">
+              <a14:hiddenFill xmlns:a14="http://schemas.microsoft.com/office/drawing/2010/main">
+                <a:solidFill>
+                  <a:schemeClr val="accent1"/>
+                </a:solidFill>
+              </a14:hiddenFill>
+            </a:ext>
+            <a:ext uri="{91240B29-F687-4F45-9708-019B960494DF}">
+              <a14:hiddenLine xmlns:a14="http://schemas.microsoft.com/office/drawing/2010/main" w="9525">
+                <a:solidFill>
+                  <a:schemeClr val="tx1"/>
+                </a:solidFill>
+                <a:miter lim="800000"/>
+                <a:headEnd/>
+                <a:tailEnd/>
+              </a14:hiddenLine>
+            </a:ext>
+          </a:extLst>
+        </p:spPr>
+      </p:pic>
+      <p:grpSp>
+        <p:nvGrpSpPr>
+          <p:cNvPr id="5" name="Group 4">
+            <a:extLst>
+              <a:ext uri="{FF2B5EF4-FFF2-40B4-BE49-F238E27FC236}">
+                <a16:creationId xmlns:a16="http://schemas.microsoft.com/office/drawing/2014/main" id="{B85AC18A-C5B5-1C2D-2E88-1A4E8BCB3B1A}"/>
+              </a:ext>
+            </a:extLst>
+          </p:cNvPr>
+          <p:cNvGrpSpPr/>
+          <p:nvPr/>
+        </p:nvGrpSpPr>
+        <p:grpSpPr>
+          <a:xfrm>
+            <a:off x="3260676" y="1691640"/>
+            <a:ext cx="5273724" cy="2133600"/>
+            <a:chOff x="990600" y="2057400"/>
+            <a:chExt cx="7086600" cy="2908300"/>
+          </a:xfrm>
+        </p:grpSpPr>
+        <p:cxnSp>
+          <p:nvCxnSpPr>
+            <p:cNvPr id="6" name="Straight Connector 5">
+              <a:extLst>
+                <a:ext uri="{FF2B5EF4-FFF2-40B4-BE49-F238E27FC236}">
+                  <a16:creationId xmlns:a16="http://schemas.microsoft.com/office/drawing/2014/main" id="{7125D4E3-EF2A-ADFA-07CF-FCA977CA94DE}"/>
+                </a:ext>
+              </a:extLst>
+            </p:cNvPr>
+            <p:cNvCxnSpPr/>
+            <p:nvPr/>
+          </p:nvCxnSpPr>
+          <p:spPr bwMode="auto">
+            <a:xfrm flipH="1" flipV="1">
+              <a:off x="990600" y="3708400"/>
+              <a:ext cx="838200" cy="1016000"/>
+            </a:xfrm>
+            <a:prstGeom prst="line">
+              <a:avLst/>
+            </a:prstGeom>
+            <a:ln w="47625">
+              <a:headEnd type="none" w="med" len="med"/>
+              <a:tailEnd type="none" w="med" len="med"/>
+            </a:ln>
+          </p:spPr>
+          <p:style>
+            <a:lnRef idx="1">
+              <a:schemeClr val="dk1"/>
+            </a:lnRef>
+            <a:fillRef idx="0">
+              <a:schemeClr val="dk1"/>
+            </a:fillRef>
+            <a:effectRef idx="0">
+              <a:schemeClr val="dk1"/>
+            </a:effectRef>
+            <a:fontRef idx="minor">
+              <a:schemeClr val="tx1"/>
+            </a:fontRef>
+          </p:style>
+        </p:cxnSp>
+        <p:cxnSp>
+          <p:nvCxnSpPr>
+            <p:cNvPr id="7" name="Straight Connector 6">
+              <a:extLst>
+                <a:ext uri="{FF2B5EF4-FFF2-40B4-BE49-F238E27FC236}">
+                  <a16:creationId xmlns:a16="http://schemas.microsoft.com/office/drawing/2014/main" id="{48ABC5BD-6C0F-7700-0CC9-96CC718B603B}"/>
+                </a:ext>
+              </a:extLst>
+            </p:cNvPr>
+            <p:cNvCxnSpPr/>
+            <p:nvPr/>
+          </p:nvCxnSpPr>
+          <p:spPr bwMode="auto">
+            <a:xfrm flipH="1">
+              <a:off x="990600" y="2286000"/>
+              <a:ext cx="838200" cy="927100"/>
+            </a:xfrm>
+            <a:prstGeom prst="line">
+              <a:avLst/>
+            </a:prstGeom>
+            <a:ln w="47625">
+              <a:headEnd type="none" w="med" len="med"/>
+              <a:tailEnd type="none" w="med" len="med"/>
+            </a:ln>
+          </p:spPr>
+          <p:style>
+            <a:lnRef idx="1">
+              <a:schemeClr val="dk1"/>
+            </a:lnRef>
+            <a:fillRef idx="0">
+              <a:schemeClr val="dk1"/>
+            </a:fillRef>
+            <a:effectRef idx="0">
+              <a:schemeClr val="dk1"/>
+            </a:effectRef>
+            <a:fontRef idx="minor">
+              <a:schemeClr val="tx1"/>
+            </a:fontRef>
+          </p:style>
+        </p:cxnSp>
+        <p:cxnSp>
+          <p:nvCxnSpPr>
+            <p:cNvPr id="8" name="Straight Connector 7">
+              <a:extLst>
+                <a:ext uri="{FF2B5EF4-FFF2-40B4-BE49-F238E27FC236}">
+                  <a16:creationId xmlns:a16="http://schemas.microsoft.com/office/drawing/2014/main" id="{1F45B24D-BDBD-783F-066A-41D010A5ADC5}"/>
+                </a:ext>
+              </a:extLst>
+            </p:cNvPr>
+            <p:cNvCxnSpPr/>
+            <p:nvPr/>
+          </p:nvCxnSpPr>
+          <p:spPr bwMode="auto">
+            <a:xfrm flipH="1">
+              <a:off x="2362200" y="4965700"/>
+              <a:ext cx="1905000" cy="0"/>
+            </a:xfrm>
+            <a:prstGeom prst="line">
+              <a:avLst/>
+            </a:prstGeom>
+            <a:ln w="47625">
+              <a:headEnd type="none" w="med" len="med"/>
+              <a:tailEnd type="none" w="med" len="med"/>
+            </a:ln>
+          </p:spPr>
+          <p:style>
+            <a:lnRef idx="1">
+              <a:schemeClr val="dk1"/>
+            </a:lnRef>
+            <a:fillRef idx="0">
+              <a:schemeClr val="dk1"/>
+            </a:fillRef>
+            <a:effectRef idx="0">
+              <a:schemeClr val="dk1"/>
+            </a:effectRef>
+            <a:fontRef idx="minor">
+              <a:schemeClr val="tx1"/>
+            </a:fontRef>
+          </p:style>
+        </p:cxnSp>
+        <p:cxnSp>
+          <p:nvCxnSpPr>
+            <p:cNvPr id="9" name="Straight Connector 8">
+              <a:extLst>
+                <a:ext uri="{FF2B5EF4-FFF2-40B4-BE49-F238E27FC236}">
+                  <a16:creationId xmlns:a16="http://schemas.microsoft.com/office/drawing/2014/main" id="{29CE9B99-876D-0FB0-8DB7-8EE690787ED2}"/>
+                </a:ext>
+              </a:extLst>
+            </p:cNvPr>
+            <p:cNvCxnSpPr/>
+            <p:nvPr/>
+          </p:nvCxnSpPr>
+          <p:spPr bwMode="auto">
+            <a:xfrm flipH="1">
+              <a:off x="4876800" y="4965700"/>
+              <a:ext cx="1905000" cy="0"/>
+            </a:xfrm>
+            <a:prstGeom prst="line">
+              <a:avLst/>
+            </a:prstGeom>
+            <a:ln w="47625">
+              <a:headEnd type="none" w="med" len="med"/>
+              <a:tailEnd type="none" w="med" len="med"/>
+            </a:ln>
+          </p:spPr>
+          <p:style>
+            <a:lnRef idx="1">
+              <a:schemeClr val="dk1"/>
+            </a:lnRef>
+            <a:fillRef idx="0">
+              <a:schemeClr val="dk1"/>
+            </a:fillRef>
+            <a:effectRef idx="0">
+              <a:schemeClr val="dk1"/>
+            </a:effectRef>
+            <a:fontRef idx="minor">
+              <a:schemeClr val="tx1"/>
+            </a:fontRef>
+          </p:style>
+        </p:cxnSp>
+        <p:cxnSp>
+          <p:nvCxnSpPr>
+            <p:cNvPr id="10" name="Straight Connector 9">
+              <a:extLst>
+                <a:ext uri="{FF2B5EF4-FFF2-40B4-BE49-F238E27FC236}">
+                  <a16:creationId xmlns:a16="http://schemas.microsoft.com/office/drawing/2014/main" id="{53425915-A5BE-4CB5-66F8-5CD9587F3CA4}"/>
+                </a:ext>
+              </a:extLst>
+            </p:cNvPr>
+            <p:cNvCxnSpPr/>
+            <p:nvPr/>
+          </p:nvCxnSpPr>
+          <p:spPr bwMode="auto">
+            <a:xfrm flipH="1">
+              <a:off x="3619500" y="3505200"/>
+              <a:ext cx="1905000" cy="0"/>
+            </a:xfrm>
+            <a:prstGeom prst="line">
+              <a:avLst/>
+            </a:prstGeom>
+            <a:ln w="47625">
+              <a:headEnd type="none" w="med" len="med"/>
+              <a:tailEnd type="none" w="med" len="med"/>
+            </a:ln>
+          </p:spPr>
+          <p:style>
+            <a:lnRef idx="1">
+              <a:schemeClr val="dk1"/>
+            </a:lnRef>
+            <a:fillRef idx="0">
+              <a:schemeClr val="dk1"/>
+            </a:fillRef>
+            <a:effectRef idx="0">
+              <a:schemeClr val="dk1"/>
+            </a:effectRef>
+            <a:fontRef idx="minor">
+              <a:schemeClr val="tx1"/>
+            </a:fontRef>
+          </p:style>
+        </p:cxnSp>
+        <p:cxnSp>
+          <p:nvCxnSpPr>
+            <p:cNvPr id="11" name="Straight Connector 10">
+              <a:extLst>
+                <a:ext uri="{FF2B5EF4-FFF2-40B4-BE49-F238E27FC236}">
+                  <a16:creationId xmlns:a16="http://schemas.microsoft.com/office/drawing/2014/main" id="{129E7A17-A151-0A6C-5E92-31266F4A508A}"/>
+                </a:ext>
+              </a:extLst>
+            </p:cNvPr>
+            <p:cNvCxnSpPr/>
+            <p:nvPr/>
+          </p:nvCxnSpPr>
+          <p:spPr bwMode="auto">
+            <a:xfrm flipH="1" flipV="1">
+              <a:off x="3505200" y="3708400"/>
+              <a:ext cx="838200" cy="1016000"/>
+            </a:xfrm>
+            <a:prstGeom prst="line">
+              <a:avLst/>
+            </a:prstGeom>
+            <a:ln w="47625">
+              <a:headEnd type="none" w="med" len="med"/>
+              <a:tailEnd type="none" w="med" len="med"/>
+            </a:ln>
+          </p:spPr>
+          <p:style>
+            <a:lnRef idx="1">
+              <a:schemeClr val="dk1"/>
+            </a:lnRef>
+            <a:fillRef idx="0">
+              <a:schemeClr val="dk1"/>
+            </a:fillRef>
+            <a:effectRef idx="0">
+              <a:schemeClr val="dk1"/>
+            </a:effectRef>
+            <a:fontRef idx="minor">
+              <a:schemeClr val="tx1"/>
+            </a:fontRef>
+          </p:style>
+        </p:cxnSp>
+        <p:cxnSp>
+          <p:nvCxnSpPr>
+            <p:cNvPr id="12" name="Straight Connector 11">
+              <a:extLst>
+                <a:ext uri="{FF2B5EF4-FFF2-40B4-BE49-F238E27FC236}">
+                  <a16:creationId xmlns:a16="http://schemas.microsoft.com/office/drawing/2014/main" id="{AC228BC5-4E49-D8D0-4235-8ED66E26D469}"/>
+                </a:ext>
+              </a:extLst>
+            </p:cNvPr>
+            <p:cNvCxnSpPr/>
+            <p:nvPr/>
+          </p:nvCxnSpPr>
+          <p:spPr bwMode="auto">
+            <a:xfrm flipH="1" flipV="1">
+              <a:off x="7239000" y="2247900"/>
+              <a:ext cx="838200" cy="1016000"/>
+            </a:xfrm>
+            <a:prstGeom prst="line">
+              <a:avLst/>
+            </a:prstGeom>
+            <a:ln w="47625">
+              <a:headEnd type="none" w="med" len="med"/>
+              <a:tailEnd type="none" w="med" len="med"/>
+            </a:ln>
+          </p:spPr>
+          <p:style>
+            <a:lnRef idx="1">
+              <a:schemeClr val="dk1"/>
+            </a:lnRef>
+            <a:fillRef idx="0">
+              <a:schemeClr val="dk1"/>
+            </a:fillRef>
+            <a:effectRef idx="0">
+              <a:schemeClr val="dk1"/>
+            </a:effectRef>
+            <a:fontRef idx="minor">
+              <a:schemeClr val="tx1"/>
+            </a:fontRef>
+          </p:style>
+        </p:cxnSp>
+        <p:cxnSp>
+          <p:nvCxnSpPr>
+            <p:cNvPr id="13" name="Straight Connector 12">
+              <a:extLst>
+                <a:ext uri="{FF2B5EF4-FFF2-40B4-BE49-F238E27FC236}">
+                  <a16:creationId xmlns:a16="http://schemas.microsoft.com/office/drawing/2014/main" id="{B25D170A-1AAA-541E-549D-2D9C081B046F}"/>
+                </a:ext>
+              </a:extLst>
+            </p:cNvPr>
+            <p:cNvCxnSpPr/>
+            <p:nvPr/>
+          </p:nvCxnSpPr>
+          <p:spPr bwMode="auto">
+            <a:xfrm flipH="1">
+              <a:off x="2362200" y="2057400"/>
+              <a:ext cx="4419600" cy="0"/>
+            </a:xfrm>
+            <a:prstGeom prst="line">
+              <a:avLst/>
+            </a:prstGeom>
+            <a:ln w="47625">
+              <a:headEnd type="none" w="med" len="med"/>
+              <a:tailEnd type="none" w="med" len="med"/>
+            </a:ln>
+          </p:spPr>
+          <p:style>
+            <a:lnRef idx="1">
+              <a:schemeClr val="dk1"/>
+            </a:lnRef>
+            <a:fillRef idx="0">
+              <a:schemeClr val="dk1"/>
+            </a:fillRef>
+            <a:effectRef idx="0">
+              <a:schemeClr val="dk1"/>
+            </a:effectRef>
+            <a:fontRef idx="minor">
+              <a:schemeClr val="tx1"/>
+            </a:fontRef>
+          </p:style>
+        </p:cxnSp>
+      </p:grpSp>
+    </p:spTree>
+    <p:extLst>
+      <p:ext uri="{BB962C8B-B14F-4D97-AF65-F5344CB8AC3E}">
+        <p14:creationId xmlns:p14="http://schemas.microsoft.com/office/powerpoint/2010/main" val="2875304011"/>
+      </p:ext>
+    </p:extLst>
+  </p:cSld>
+  <p:clrMapOvr>
+    <a:masterClrMapping/>
+  </p:clrMapOvr>
+  <p:timing>
+    <p:tnLst>
+      <p:par>
+        <p:cTn id="1" dur="indefinite" restart="never" nodeType="tmRoot">
+          <p:childTnLst>
+            <p:seq concurrent="1" nextAc="seek">
+              <p:cTn id="2" dur="indefinite" nodeType="mainSeq">
+                <p:childTnLst>
+                  <p:par>
+                    <p:cTn id="3" fill="hold">
+                      <p:stCondLst>
+                        <p:cond delay="indefinite"/>
+                      </p:stCondLst>
+                      <p:childTnLst>
+                        <p:par>
+                          <p:cTn id="4" fill="hold">
+                            <p:stCondLst>
+                              <p:cond delay="0"/>
+                            </p:stCondLst>
+                            <p:childTnLst>
+                              <p:par>
+                                <p:cTn id="5" presetID="1" presetClass="entr" presetSubtype="0" fill="hold" nodeType="clickEffect">
+                                  <p:stCondLst>
+                                    <p:cond delay="0"/>
+                                  </p:stCondLst>
+                                  <p:childTnLst>
+                                    <p:set>
+                                      <p:cBhvr>
+                                        <p:cTn id="6" dur="1" fill="hold">
+                                          <p:stCondLst>
+                                            <p:cond delay="0"/>
+                                          </p:stCondLst>
+                                        </p:cTn>
+                                        <p:tgtEl>
+                                          <p:spTgt spid="5"/>
+                                        </p:tgtEl>
+                                        <p:attrNameLst>
+                                          <p:attrName>style.visibility</p:attrName>
+                                        </p:attrNameLst>
+                                      </p:cBhvr>
+                                      <p:to>
+                                        <p:strVal val="visible"/>
+                                      </p:to>
+                                    </p:set>
+                                  </p:childTnLst>
+                                </p:cTn>
+                              </p:par>
+                            </p:childTnLst>
+                          </p:cTn>
+                        </p:par>
+                      </p:childTnLst>
+                    </p:cTn>
+                  </p:par>
+                </p:childTnLst>
+              </p:cTn>
+              <p:prevCondLst>
+                <p:cond evt="onPrev" delay="0">
+                  <p:tgtEl>
+                    <p:sldTgt/>
+                  </p:tgtEl>
+                </p:cond>
+              </p:prevCondLst>
+              <p:nextCondLst>
+                <p:cond evt="onNext" delay="0">
+                  <p:tgtEl>
+                    <p:sldTgt/>
+                  </p:tgtEl>
+                </p:cond>
+              </p:nextCondLst>
+            </p:seq>
+          </p:childTnLst>
+        </p:cTn>
+      </p:par>
+    </p:tnLst>
+  </p:timing>
+</p:sld>
+</file>
+
+<file path=ppt/slides/slide12.xml><?xml version="1.0" encoding="utf-8"?>
+<p:sld xmlns:a="http://schemas.openxmlformats.org/drawingml/2006/main" xmlns:r="http://schemas.openxmlformats.org/officeDocument/2006/relationships" xmlns:p="http://schemas.openxmlformats.org/presentationml/2006/main">
+  <p:cSld>
+    <p:spTree>
+      <p:nvGrpSpPr>
+        <p:cNvPr id="1" name=""/>
+        <p:cNvGrpSpPr/>
+        <p:nvPr/>
+      </p:nvGrpSpPr>
+      <p:grpSpPr>
+        <a:xfrm>
+          <a:off x="0" y="0"/>
+          <a:ext cx="0" cy="0"/>
+          <a:chOff x="0" y="0"/>
+          <a:chExt cx="0" cy="0"/>
+        </a:xfrm>
+      </p:grpSpPr>
+      <p:sp>
+        <p:nvSpPr>
+          <p:cNvPr id="2" name="Title 1">
+            <a:extLst>
+              <a:ext uri="{FF2B5EF4-FFF2-40B4-BE49-F238E27FC236}">
                 <a16:creationId xmlns:a16="http://schemas.microsoft.com/office/drawing/2014/main" id="{636D4523-394F-4DC9-B980-B54D161405A9}"/>
               </a:ext>
             </a:extLst>
@@ -9114,7 +9813,7 @@
 </p:sld>
 </file>
 
-<file path=ppt/slides/slide11.xml><?xml version="1.0" encoding="utf-8"?>
+<file path=ppt/slides/slide13.xml><?xml version="1.0" encoding="utf-8"?>
 <p:sld xmlns:a="http://schemas.openxmlformats.org/drawingml/2006/main" xmlns:r="http://schemas.openxmlformats.org/officeDocument/2006/relationships" xmlns:p="http://schemas.openxmlformats.org/presentationml/2006/main">
   <p:cSld>
     <p:spTree>
@@ -9841,7 +10540,7 @@
 </p:sld>
 </file>
 
-<file path=ppt/slides/slide12.xml><?xml version="1.0" encoding="utf-8"?>
+<file path=ppt/slides/slide14.xml><?xml version="1.0" encoding="utf-8"?>
 <p:sld xmlns:a="http://schemas.openxmlformats.org/drawingml/2006/main" xmlns:r="http://schemas.openxmlformats.org/officeDocument/2006/relationships" xmlns:p="http://schemas.openxmlformats.org/presentationml/2006/main">
   <p:cSld>
     <p:spTree>
@@ -10314,7 +11013,7 @@
 </p:sld>
 </file>
 
-<file path=ppt/slides/slide13.xml><?xml version="1.0" encoding="utf-8"?>
+<file path=ppt/slides/slide15.xml><?xml version="1.0" encoding="utf-8"?>
 <p:sld xmlns:a="http://schemas.openxmlformats.org/drawingml/2006/main" xmlns:r="http://schemas.openxmlformats.org/officeDocument/2006/relationships" xmlns:p="http://schemas.openxmlformats.org/presentationml/2006/main">
   <p:cSld>
     <p:spTree>
@@ -11387,7 +12086,7 @@
 </p:sld>
 </file>
 
-<file path=ppt/slides/slide14.xml><?xml version="1.0" encoding="utf-8"?>
+<file path=ppt/slides/slide16.xml><?xml version="1.0" encoding="utf-8"?>
 <p:sld xmlns:a="http://schemas.openxmlformats.org/drawingml/2006/main" xmlns:r="http://schemas.openxmlformats.org/officeDocument/2006/relationships" xmlns:p="http://schemas.openxmlformats.org/presentationml/2006/main">
   <p:cSld>
     <p:spTree>
@@ -11787,7 +12486,7 @@
 </p:sld>
 </file>
 
-<file path=ppt/slides/slide15.xml><?xml version="1.0" encoding="utf-8"?>
+<file path=ppt/slides/slide17.xml><?xml version="1.0" encoding="utf-8"?>
 <p:sld xmlns:a="http://schemas.openxmlformats.org/drawingml/2006/main" xmlns:r="http://schemas.openxmlformats.org/officeDocument/2006/relationships" xmlns:p="http://schemas.openxmlformats.org/presentationml/2006/main">
   <p:cSld>
     <p:spTree>
@@ -12288,7 +12987,7 @@
 </p:sld>
 </file>
 
-<file path=ppt/slides/slide16.xml><?xml version="1.0" encoding="utf-8"?>
+<file path=ppt/slides/slide18.xml><?xml version="1.0" encoding="utf-8"?>
 <p:sld xmlns:a="http://schemas.openxmlformats.org/drawingml/2006/main" xmlns:r="http://schemas.openxmlformats.org/officeDocument/2006/relationships" xmlns:p="http://schemas.openxmlformats.org/presentationml/2006/main">
   <p:cSld>
     <p:spTree>
@@ -12406,7 +13105,7 @@
 </p:sld>
 </file>
 
-<file path=ppt/slides/slide17.xml><?xml version="1.0" encoding="utf-8"?>
+<file path=ppt/slides/slide19.xml><?xml version="1.0" encoding="utf-8"?>
 <p:sld xmlns:a="http://schemas.openxmlformats.org/drawingml/2006/main" xmlns:r="http://schemas.openxmlformats.org/officeDocument/2006/relationships" xmlns:p="http://schemas.openxmlformats.org/presentationml/2006/main">
   <p:cSld>
     <p:spTree>
@@ -12896,7 +13595,292 @@
 </p:sld>
 </file>
 
-<file path=ppt/slides/slide18.xml><?xml version="1.0" encoding="utf-8"?>
+<file path=ppt/slides/slide2.xml><?xml version="1.0" encoding="utf-8"?>
+<p:sld xmlns:a="http://schemas.openxmlformats.org/drawingml/2006/main" xmlns:r="http://schemas.openxmlformats.org/officeDocument/2006/relationships" xmlns:p="http://schemas.openxmlformats.org/presentationml/2006/main">
+  <p:cSld>
+    <p:spTree>
+      <p:nvGrpSpPr>
+        <p:cNvPr id="1" name=""/>
+        <p:cNvGrpSpPr/>
+        <p:nvPr/>
+      </p:nvGrpSpPr>
+      <p:grpSpPr>
+        <a:xfrm>
+          <a:off x="0" y="0"/>
+          <a:ext cx="0" cy="0"/>
+          <a:chOff x="0" y="0"/>
+          <a:chExt cx="0" cy="0"/>
+        </a:xfrm>
+      </p:grpSpPr>
+      <p:sp>
+        <p:nvSpPr>
+          <p:cNvPr id="2" name="Title 1">
+            <a:extLst>
+              <a:ext uri="{FF2B5EF4-FFF2-40B4-BE49-F238E27FC236}">
+                <a16:creationId xmlns:a16="http://schemas.microsoft.com/office/drawing/2014/main" id="{603F6649-5A64-45D6-A6CA-8E8A3A6B0CDE}"/>
+              </a:ext>
+            </a:extLst>
+          </p:cNvPr>
+          <p:cNvSpPr>
+            <a:spLocks noGrp="1"/>
+          </p:cNvSpPr>
+          <p:nvPr>
+            <p:ph type="title"/>
+          </p:nvPr>
+        </p:nvSpPr>
+        <p:spPr/>
+        <p:txBody>
+          <a:bodyPr/>
+          <a:lstStyle/>
+          <a:p>
+            <a:r>
+              <a:rPr lang="en-US" dirty="0"/>
+              <a:t>Previously </a:t>
+            </a:r>
+          </a:p>
+        </p:txBody>
+      </p:sp>
+      <mc:AlternateContent xmlns:mc="http://schemas.openxmlformats.org/markup-compatibility/2006" xmlns:a14="http://schemas.microsoft.com/office/drawing/2010/main">
+        <mc:Choice Requires="a14">
+          <p:sp>
+            <p:nvSpPr>
+              <p:cNvPr id="3" name="Content Placeholder 2">
+                <a:extLst>
+                  <a:ext uri="{FF2B5EF4-FFF2-40B4-BE49-F238E27FC236}">
+                    <a16:creationId xmlns:a16="http://schemas.microsoft.com/office/drawing/2014/main" id="{1C494781-9569-4BCE-B3A3-2C8EB0F996BF}"/>
+                  </a:ext>
+                </a:extLst>
+              </p:cNvPr>
+              <p:cNvSpPr>
+                <a:spLocks noGrp="1"/>
+              </p:cNvSpPr>
+              <p:nvPr>
+                <p:ph sz="quarter" idx="1"/>
+              </p:nvPr>
+            </p:nvSpPr>
+            <p:spPr/>
+            <p:txBody>
+              <a:bodyPr/>
+              <a:lstStyle/>
+              <a:p>
+                <a:r>
+                  <a:rPr lang="en-US" dirty="0"/>
+                  <a:t>Given a weighted undirected graph </a:t>
+                </a:r>
+              </a:p>
+              <a:p>
+                <a:pPr lvl="1"/>
+                <a:r>
+                  <a:rPr lang="en-US" dirty="0">
+                    <a:solidFill>
+                      <a:srgbClr val="700000"/>
+                    </a:solidFill>
+                  </a:rPr>
+                  <a:t>Prim’s</a:t>
+                </a:r>
+                <a:r>
+                  <a:rPr lang="en-US" dirty="0"/>
+                  <a:t> algorithm to compute the minimum spanning tree (MST) in </a:t>
+                </a:r>
+                <a14:m>
+                  <m:oMath xmlns:m="http://schemas.openxmlformats.org/officeDocument/2006/math">
+                    <m:r>
+                      <m:rPr>
+                        <m:sty m:val="p"/>
+                      </m:rPr>
+                      <a:rPr lang="en-US" b="0" i="0" smtClean="0">
+                        <a:latin typeface="Cambria Math" panose="02040503050406030204" pitchFamily="18" charset="0"/>
+                      </a:rPr>
+                      <m:t>Θ</m:t>
+                    </m:r>
+                    <m:r>
+                      <a:rPr lang="en-US" b="0" i="1" smtClean="0">
+                        <a:latin typeface="Cambria Math" panose="02040503050406030204" pitchFamily="18" charset="0"/>
+                      </a:rPr>
+                      <m:t>(</m:t>
+                    </m:r>
+                    <m:d>
+                      <m:dPr>
+                        <m:ctrlPr>
+                          <a:rPr lang="en-US" b="0" i="1" smtClean="0">
+                            <a:latin typeface="Cambria Math" panose="02040503050406030204" pitchFamily="18" charset="0"/>
+                          </a:rPr>
+                        </m:ctrlPr>
+                      </m:dPr>
+                      <m:e>
+                        <m:r>
+                          <a:rPr lang="en-US" b="0" i="1" smtClean="0">
+                            <a:latin typeface="Cambria Math" panose="02040503050406030204" pitchFamily="18" charset="0"/>
+                          </a:rPr>
+                          <m:t>𝑉</m:t>
+                        </m:r>
+                        <m:r>
+                          <a:rPr lang="en-US" b="0" i="1" smtClean="0">
+                            <a:latin typeface="Cambria Math" panose="02040503050406030204" pitchFamily="18" charset="0"/>
+                          </a:rPr>
+                          <m:t>+</m:t>
+                        </m:r>
+                        <m:r>
+                          <a:rPr lang="en-US" b="0" i="1" smtClean="0">
+                            <a:latin typeface="Cambria Math" panose="02040503050406030204" pitchFamily="18" charset="0"/>
+                          </a:rPr>
+                          <m:t>𝐸</m:t>
+                        </m:r>
+                      </m:e>
+                    </m:d>
+                    <m:func>
+                      <m:funcPr>
+                        <m:ctrlPr>
+                          <a:rPr lang="en-US" b="0" i="1" smtClean="0">
+                            <a:latin typeface="Cambria Math" panose="02040503050406030204" pitchFamily="18" charset="0"/>
+                          </a:rPr>
+                        </m:ctrlPr>
+                      </m:funcPr>
+                      <m:fName>
+                        <m:r>
+                          <m:rPr>
+                            <m:sty m:val="p"/>
+                          </m:rPr>
+                          <a:rPr lang="en-US" b="0" i="0" smtClean="0">
+                            <a:latin typeface="Cambria Math" panose="02040503050406030204" pitchFamily="18" charset="0"/>
+                          </a:rPr>
+                          <m:t>lg</m:t>
+                        </m:r>
+                      </m:fName>
+                      <m:e>
+                        <m:r>
+                          <a:rPr lang="en-US" b="0" i="1" smtClean="0">
+                            <a:latin typeface="Cambria Math" panose="02040503050406030204" pitchFamily="18" charset="0"/>
+                          </a:rPr>
+                          <m:t>𝑉</m:t>
+                        </m:r>
+                      </m:e>
+                    </m:func>
+                    <m:r>
+                      <a:rPr lang="en-US" b="0" i="1" smtClean="0">
+                        <a:latin typeface="Cambria Math" panose="02040503050406030204" pitchFamily="18" charset="0"/>
+                      </a:rPr>
+                      <m:t>)</m:t>
+                    </m:r>
+                  </m:oMath>
+                </a14:m>
+                <a:r>
+                  <a:rPr lang="en-US" dirty="0"/>
+                  <a:t> time</a:t>
+                </a:r>
+              </a:p>
+              <a:p>
+                <a:pPr lvl="2"/>
+                <a:r>
+                  <a:rPr lang="en-US" dirty="0"/>
+                  <a:t>It is a greedy algorithm</a:t>
+                </a:r>
+              </a:p>
+              <a:p>
+                <a:pPr lvl="2"/>
+                <a:endParaRPr lang="en-US" dirty="0"/>
+              </a:p>
+              <a:p>
+                <a:pPr lvl="2"/>
+                <a:endParaRPr lang="en-US" dirty="0"/>
+              </a:p>
+              <a:p>
+                <a:r>
+                  <a:rPr lang="en-US" dirty="0"/>
+                  <a:t>Today: </a:t>
+                </a:r>
+              </a:p>
+              <a:p>
+                <a:pPr lvl="1"/>
+                <a:r>
+                  <a:rPr lang="en-US" dirty="0"/>
+                  <a:t>Yet another greedy algorithm to compute MST, called </a:t>
+                </a:r>
+                <a:r>
+                  <a:rPr lang="en-US" dirty="0">
+                    <a:solidFill>
+                      <a:srgbClr val="700000"/>
+                    </a:solidFill>
+                  </a:rPr>
+                  <a:t>Kruskal’s</a:t>
+                </a:r>
+                <a:r>
+                  <a:rPr lang="en-US" dirty="0"/>
+                  <a:t> algorithm</a:t>
+                </a:r>
+              </a:p>
+              <a:p>
+                <a:pPr lvl="1"/>
+                <a:r>
+                  <a:rPr lang="en-US" dirty="0"/>
+                  <a:t>Relation to hierarchical clustering </a:t>
+                </a:r>
+              </a:p>
+              <a:p>
+                <a:pPr lvl="1"/>
+                <a:endParaRPr lang="en-US" dirty="0">
+                  <a:solidFill>
+                    <a:srgbClr val="C00000"/>
+                  </a:solidFill>
+                </a:endParaRPr>
+              </a:p>
+            </p:txBody>
+          </p:sp>
+        </mc:Choice>
+        <mc:Fallback xmlns="">
+          <p:sp>
+            <p:nvSpPr>
+              <p:cNvPr id="3" name="Content Placeholder 2">
+                <a:extLst>
+                  <a:ext uri="{FF2B5EF4-FFF2-40B4-BE49-F238E27FC236}">
+                    <a16:creationId xmlns:a16="http://schemas.microsoft.com/office/drawing/2014/main" id="{1C494781-9569-4BCE-B3A3-2C8EB0F996BF}"/>
+                  </a:ext>
+                </a:extLst>
+              </p:cNvPr>
+              <p:cNvSpPr>
+                <a:spLocks noGrp="1" noRot="1" noChangeAspect="1" noMove="1" noResize="1" noEditPoints="1" noAdjustHandles="1" noChangeArrowheads="1" noChangeShapeType="1" noTextEdit="1"/>
+              </p:cNvSpPr>
+              <p:nvPr>
+                <p:ph sz="quarter" idx="1"/>
+              </p:nvPr>
+            </p:nvSpPr>
+            <p:spPr>
+              <a:blipFill>
+                <a:blip r:embed="rId2"/>
+                <a:stretch>
+                  <a:fillRect l="-667" t="-1111" r="-1778"/>
+                </a:stretch>
+              </a:blipFill>
+            </p:spPr>
+            <p:txBody>
+              <a:bodyPr/>
+              <a:lstStyle/>
+              <a:p>
+                <a:r>
+                  <a:rPr lang="en-US">
+                    <a:noFill/>
+                  </a:rPr>
+                  <a:t> </a:t>
+                </a:r>
+              </a:p>
+            </p:txBody>
+          </p:sp>
+        </mc:Fallback>
+      </mc:AlternateContent>
+    </p:spTree>
+    <p:extLst>
+      <p:ext uri="{BB962C8B-B14F-4D97-AF65-F5344CB8AC3E}">
+        <p14:creationId xmlns:p14="http://schemas.microsoft.com/office/powerpoint/2010/main" val="2750505869"/>
+      </p:ext>
+    </p:extLst>
+  </p:cSld>
+  <p:clrMapOvr>
+    <a:masterClrMapping/>
+  </p:clrMapOvr>
+</p:sld>
+</file>
+
+<file path=ppt/slides/slide20.xml><?xml version="1.0" encoding="utf-8"?>
 <p:sld xmlns:a="http://schemas.openxmlformats.org/drawingml/2006/main" xmlns:r="http://schemas.openxmlformats.org/officeDocument/2006/relationships" xmlns:p="http://schemas.openxmlformats.org/presentationml/2006/main">
   <p:cSld>
     <p:spTree>
@@ -13713,7 +14697,7 @@
 </p:sld>
 </file>
 
-<file path=ppt/slides/slide19.xml><?xml version="1.0" encoding="utf-8"?>
+<file path=ppt/slides/slide21.xml><?xml version="1.0" encoding="utf-8"?>
 <p:sld xmlns:a="http://schemas.openxmlformats.org/drawingml/2006/main" xmlns:r="http://schemas.openxmlformats.org/officeDocument/2006/relationships" xmlns:p="http://schemas.openxmlformats.org/presentationml/2006/main">
   <p:cSld>
     <p:spTree>
@@ -13777,292 +14761,7 @@
 </p:sld>
 </file>
 
-<file path=ppt/slides/slide2.xml><?xml version="1.0" encoding="utf-8"?>
-<p:sld xmlns:a="http://schemas.openxmlformats.org/drawingml/2006/main" xmlns:r="http://schemas.openxmlformats.org/officeDocument/2006/relationships" xmlns:p="http://schemas.openxmlformats.org/presentationml/2006/main">
-  <p:cSld>
-    <p:spTree>
-      <p:nvGrpSpPr>
-        <p:cNvPr id="1" name=""/>
-        <p:cNvGrpSpPr/>
-        <p:nvPr/>
-      </p:nvGrpSpPr>
-      <p:grpSpPr>
-        <a:xfrm>
-          <a:off x="0" y="0"/>
-          <a:ext cx="0" cy="0"/>
-          <a:chOff x="0" y="0"/>
-          <a:chExt cx="0" cy="0"/>
-        </a:xfrm>
-      </p:grpSpPr>
-      <p:sp>
-        <p:nvSpPr>
-          <p:cNvPr id="2" name="Title 1">
-            <a:extLst>
-              <a:ext uri="{FF2B5EF4-FFF2-40B4-BE49-F238E27FC236}">
-                <a16:creationId xmlns:a16="http://schemas.microsoft.com/office/drawing/2014/main" id="{603F6649-5A64-45D6-A6CA-8E8A3A6B0CDE}"/>
-              </a:ext>
-            </a:extLst>
-          </p:cNvPr>
-          <p:cNvSpPr>
-            <a:spLocks noGrp="1"/>
-          </p:cNvSpPr>
-          <p:nvPr>
-            <p:ph type="title"/>
-          </p:nvPr>
-        </p:nvSpPr>
-        <p:spPr/>
-        <p:txBody>
-          <a:bodyPr/>
-          <a:lstStyle/>
-          <a:p>
-            <a:r>
-              <a:rPr lang="en-US" dirty="0"/>
-              <a:t>Previously </a:t>
-            </a:r>
-          </a:p>
-        </p:txBody>
-      </p:sp>
-      <mc:AlternateContent xmlns:mc="http://schemas.openxmlformats.org/markup-compatibility/2006" xmlns:a14="http://schemas.microsoft.com/office/drawing/2010/main">
-        <mc:Choice Requires="a14">
-          <p:sp>
-            <p:nvSpPr>
-              <p:cNvPr id="3" name="Content Placeholder 2">
-                <a:extLst>
-                  <a:ext uri="{FF2B5EF4-FFF2-40B4-BE49-F238E27FC236}">
-                    <a16:creationId xmlns:a16="http://schemas.microsoft.com/office/drawing/2014/main" id="{1C494781-9569-4BCE-B3A3-2C8EB0F996BF}"/>
-                  </a:ext>
-                </a:extLst>
-              </p:cNvPr>
-              <p:cNvSpPr>
-                <a:spLocks noGrp="1"/>
-              </p:cNvSpPr>
-              <p:nvPr>
-                <p:ph sz="quarter" idx="1"/>
-              </p:nvPr>
-            </p:nvSpPr>
-            <p:spPr/>
-            <p:txBody>
-              <a:bodyPr/>
-              <a:lstStyle/>
-              <a:p>
-                <a:r>
-                  <a:rPr lang="en-US" dirty="0"/>
-                  <a:t>Given a weighted undirected graph </a:t>
-                </a:r>
-              </a:p>
-              <a:p>
-                <a:pPr lvl="1"/>
-                <a:r>
-                  <a:rPr lang="en-US" dirty="0">
-                    <a:solidFill>
-                      <a:srgbClr val="700000"/>
-                    </a:solidFill>
-                  </a:rPr>
-                  <a:t>Prim’s</a:t>
-                </a:r>
-                <a:r>
-                  <a:rPr lang="en-US" dirty="0"/>
-                  <a:t> algorithm to compute the minimum spanning tree (MST) in </a:t>
-                </a:r>
-                <a14:m>
-                  <m:oMath xmlns:m="http://schemas.openxmlformats.org/officeDocument/2006/math">
-                    <m:r>
-                      <m:rPr>
-                        <m:sty m:val="p"/>
-                      </m:rPr>
-                      <a:rPr lang="en-US" b="0" i="0" smtClean="0">
-                        <a:latin typeface="Cambria Math" panose="02040503050406030204" pitchFamily="18" charset="0"/>
-                      </a:rPr>
-                      <m:t>Θ</m:t>
-                    </m:r>
-                    <m:r>
-                      <a:rPr lang="en-US" b="0" i="1" smtClean="0">
-                        <a:latin typeface="Cambria Math" panose="02040503050406030204" pitchFamily="18" charset="0"/>
-                      </a:rPr>
-                      <m:t>(</m:t>
-                    </m:r>
-                    <m:d>
-                      <m:dPr>
-                        <m:ctrlPr>
-                          <a:rPr lang="en-US" b="0" i="1" smtClean="0">
-                            <a:latin typeface="Cambria Math" panose="02040503050406030204" pitchFamily="18" charset="0"/>
-                          </a:rPr>
-                        </m:ctrlPr>
-                      </m:dPr>
-                      <m:e>
-                        <m:r>
-                          <a:rPr lang="en-US" b="0" i="1" smtClean="0">
-                            <a:latin typeface="Cambria Math" panose="02040503050406030204" pitchFamily="18" charset="0"/>
-                          </a:rPr>
-                          <m:t>𝑉</m:t>
-                        </m:r>
-                        <m:r>
-                          <a:rPr lang="en-US" b="0" i="1" smtClean="0">
-                            <a:latin typeface="Cambria Math" panose="02040503050406030204" pitchFamily="18" charset="0"/>
-                          </a:rPr>
-                          <m:t>+</m:t>
-                        </m:r>
-                        <m:r>
-                          <a:rPr lang="en-US" b="0" i="1" smtClean="0">
-                            <a:latin typeface="Cambria Math" panose="02040503050406030204" pitchFamily="18" charset="0"/>
-                          </a:rPr>
-                          <m:t>𝐸</m:t>
-                        </m:r>
-                      </m:e>
-                    </m:d>
-                    <m:func>
-                      <m:funcPr>
-                        <m:ctrlPr>
-                          <a:rPr lang="en-US" b="0" i="1" smtClean="0">
-                            <a:latin typeface="Cambria Math" panose="02040503050406030204" pitchFamily="18" charset="0"/>
-                          </a:rPr>
-                        </m:ctrlPr>
-                      </m:funcPr>
-                      <m:fName>
-                        <m:r>
-                          <m:rPr>
-                            <m:sty m:val="p"/>
-                          </m:rPr>
-                          <a:rPr lang="en-US" b="0" i="0" smtClean="0">
-                            <a:latin typeface="Cambria Math" panose="02040503050406030204" pitchFamily="18" charset="0"/>
-                          </a:rPr>
-                          <m:t>lg</m:t>
-                        </m:r>
-                      </m:fName>
-                      <m:e>
-                        <m:r>
-                          <a:rPr lang="en-US" b="0" i="1" smtClean="0">
-                            <a:latin typeface="Cambria Math" panose="02040503050406030204" pitchFamily="18" charset="0"/>
-                          </a:rPr>
-                          <m:t>𝑉</m:t>
-                        </m:r>
-                      </m:e>
-                    </m:func>
-                    <m:r>
-                      <a:rPr lang="en-US" b="0" i="1" smtClean="0">
-                        <a:latin typeface="Cambria Math" panose="02040503050406030204" pitchFamily="18" charset="0"/>
-                      </a:rPr>
-                      <m:t>)</m:t>
-                    </m:r>
-                  </m:oMath>
-                </a14:m>
-                <a:r>
-                  <a:rPr lang="en-US" dirty="0"/>
-                  <a:t> time</a:t>
-                </a:r>
-              </a:p>
-              <a:p>
-                <a:pPr lvl="2"/>
-                <a:r>
-                  <a:rPr lang="en-US" dirty="0"/>
-                  <a:t>It is a greedy algorithm</a:t>
-                </a:r>
-              </a:p>
-              <a:p>
-                <a:pPr lvl="2"/>
-                <a:endParaRPr lang="en-US" dirty="0"/>
-              </a:p>
-              <a:p>
-                <a:pPr lvl="2"/>
-                <a:endParaRPr lang="en-US" dirty="0"/>
-              </a:p>
-              <a:p>
-                <a:r>
-                  <a:rPr lang="en-US" dirty="0"/>
-                  <a:t>Today: </a:t>
-                </a:r>
-              </a:p>
-              <a:p>
-                <a:pPr lvl="1"/>
-                <a:r>
-                  <a:rPr lang="en-US" dirty="0"/>
-                  <a:t>Yet another greedy algorithm to compute MST, called </a:t>
-                </a:r>
-                <a:r>
-                  <a:rPr lang="en-US" dirty="0">
-                    <a:solidFill>
-                      <a:srgbClr val="700000"/>
-                    </a:solidFill>
-                  </a:rPr>
-                  <a:t>Kruskal’s</a:t>
-                </a:r>
-                <a:r>
-                  <a:rPr lang="en-US" dirty="0"/>
-                  <a:t> algorithm</a:t>
-                </a:r>
-              </a:p>
-              <a:p>
-                <a:pPr lvl="1"/>
-                <a:r>
-                  <a:rPr lang="en-US" dirty="0"/>
-                  <a:t>Relation to hierarchical clustering </a:t>
-                </a:r>
-              </a:p>
-              <a:p>
-                <a:pPr lvl="1"/>
-                <a:endParaRPr lang="en-US" dirty="0">
-                  <a:solidFill>
-                    <a:srgbClr val="C00000"/>
-                  </a:solidFill>
-                </a:endParaRPr>
-              </a:p>
-            </p:txBody>
-          </p:sp>
-        </mc:Choice>
-        <mc:Fallback xmlns="">
-          <p:sp>
-            <p:nvSpPr>
-              <p:cNvPr id="3" name="Content Placeholder 2">
-                <a:extLst>
-                  <a:ext uri="{FF2B5EF4-FFF2-40B4-BE49-F238E27FC236}">
-                    <a16:creationId xmlns:a16="http://schemas.microsoft.com/office/drawing/2014/main" id="{1C494781-9569-4BCE-B3A3-2C8EB0F996BF}"/>
-                  </a:ext>
-                </a:extLst>
-              </p:cNvPr>
-              <p:cNvSpPr>
-                <a:spLocks noGrp="1" noRot="1" noChangeAspect="1" noMove="1" noResize="1" noEditPoints="1" noAdjustHandles="1" noChangeArrowheads="1" noChangeShapeType="1" noTextEdit="1"/>
-              </p:cNvSpPr>
-              <p:nvPr>
-                <p:ph sz="quarter" idx="1"/>
-              </p:nvPr>
-            </p:nvSpPr>
-            <p:spPr>
-              <a:blipFill>
-                <a:blip r:embed="rId2"/>
-                <a:stretch>
-                  <a:fillRect l="-667" t="-1111" r="-1778"/>
-                </a:stretch>
-              </a:blipFill>
-            </p:spPr>
-            <p:txBody>
-              <a:bodyPr/>
-              <a:lstStyle/>
-              <a:p>
-                <a:r>
-                  <a:rPr lang="en-US">
-                    <a:noFill/>
-                  </a:rPr>
-                  <a:t> </a:t>
-                </a:r>
-              </a:p>
-            </p:txBody>
-          </p:sp>
-        </mc:Fallback>
-      </mc:AlternateContent>
-    </p:spTree>
-    <p:extLst>
-      <p:ext uri="{BB962C8B-B14F-4D97-AF65-F5344CB8AC3E}">
-        <p14:creationId xmlns:p14="http://schemas.microsoft.com/office/powerpoint/2010/main" val="2750505869"/>
-      </p:ext>
-    </p:extLst>
-  </p:cSld>
-  <p:clrMapOvr>
-    <a:masterClrMapping/>
-  </p:clrMapOvr>
-</p:sld>
-</file>
-
-<file path=ppt/slides/slide20.xml><?xml version="1.0" encoding="utf-8"?>
+<file path=ppt/slides/slide22.xml><?xml version="1.0" encoding="utf-8"?>
 <p:sld xmlns:a="http://schemas.openxmlformats.org/drawingml/2006/main" xmlns:r="http://schemas.openxmlformats.org/officeDocument/2006/relationships" xmlns:p="http://schemas.openxmlformats.org/presentationml/2006/main">
   <p:cSld>
     <p:spTree>
@@ -14317,12 +15016,286 @@
           </a:p>
         </p:txBody>
       </p:sp>
+    </p:spTree>
+    <p:extLst>
+      <p:ext uri="{BB962C8B-B14F-4D97-AF65-F5344CB8AC3E}">
+        <p14:creationId xmlns:p14="http://schemas.microsoft.com/office/powerpoint/2010/main" val="1605359177"/>
+      </p:ext>
+    </p:extLst>
+  </p:cSld>
+  <p:clrMapOvr>
+    <a:masterClrMapping/>
+  </p:clrMapOvr>
+</p:sld>
+</file>
+
+<file path=ppt/slides/slide23.xml><?xml version="1.0" encoding="utf-8"?>
+<p:sld xmlns:a="http://schemas.openxmlformats.org/drawingml/2006/main" xmlns:r="http://schemas.openxmlformats.org/officeDocument/2006/relationships" xmlns:p="http://schemas.openxmlformats.org/presentationml/2006/main">
+  <p:cSld>
+    <p:spTree>
+      <p:nvGrpSpPr>
+        <p:cNvPr id="1" name="">
+          <a:extLst>
+            <a:ext uri="{FF2B5EF4-FFF2-40B4-BE49-F238E27FC236}">
+              <a16:creationId xmlns:a16="http://schemas.microsoft.com/office/drawing/2014/main" id="{9B639100-5BD5-FD0D-14AA-5E859499E50E}"/>
+            </a:ext>
+          </a:extLst>
+        </p:cNvPr>
+        <p:cNvGrpSpPr/>
+        <p:nvPr/>
+      </p:nvGrpSpPr>
+      <p:grpSpPr>
+        <a:xfrm>
+          <a:off x="0" y="0"/>
+          <a:ext cx="0" cy="0"/>
+          <a:chOff x="0" y="0"/>
+          <a:chExt cx="0" cy="0"/>
+        </a:xfrm>
+      </p:grpSpPr>
+      <p:sp>
+        <p:nvSpPr>
+          <p:cNvPr id="2" name="Title 1">
+            <a:extLst>
+              <a:ext uri="{FF2B5EF4-FFF2-40B4-BE49-F238E27FC236}">
+                <a16:creationId xmlns:a16="http://schemas.microsoft.com/office/drawing/2014/main" id="{D84B6A45-8DC4-E2AD-51ED-CC8091C400B0}"/>
+              </a:ext>
+            </a:extLst>
+          </p:cNvPr>
+          <p:cNvSpPr>
+            <a:spLocks noGrp="1"/>
+          </p:cNvSpPr>
+          <p:nvPr>
+            <p:ph type="title"/>
+          </p:nvPr>
+        </p:nvSpPr>
+        <p:spPr/>
+        <p:txBody>
+          <a:bodyPr/>
+          <a:lstStyle/>
+          <a:p>
+            <a:r>
+              <a:rPr lang="en-US" dirty="0"/>
+              <a:t>Clustering problem</a:t>
+            </a:r>
+          </a:p>
+        </p:txBody>
+      </p:sp>
+      <mc:AlternateContent xmlns:mc="http://schemas.openxmlformats.org/markup-compatibility/2006">
+        <mc:Choice xmlns:a14="http://schemas.microsoft.com/office/drawing/2010/main" Requires="a14">
+          <p:sp>
+            <p:nvSpPr>
+              <p:cNvPr id="3" name="Content Placeholder 2">
+                <a:extLst>
+                  <a:ext uri="{FF2B5EF4-FFF2-40B4-BE49-F238E27FC236}">
+                    <a16:creationId xmlns:a16="http://schemas.microsoft.com/office/drawing/2014/main" id="{A0B24C07-F595-170C-7AA3-3AA89BA9F3C4}"/>
+                  </a:ext>
+                </a:extLst>
+              </p:cNvPr>
+              <p:cNvSpPr>
+                <a:spLocks noGrp="1"/>
+              </p:cNvSpPr>
+              <p:nvPr>
+                <p:ph sz="quarter" idx="1"/>
+              </p:nvPr>
+            </p:nvSpPr>
+            <p:spPr/>
+            <p:txBody>
+              <a:bodyPr/>
+              <a:lstStyle/>
+              <a:p>
+                <a:r>
+                  <a:rPr lang="en-US" dirty="0"/>
+                  <a:t>Identify the groups in data</a:t>
+                </a:r>
+              </a:p>
+              <a:p>
+                <a:r>
+                  <a:rPr lang="en-US" dirty="0"/>
+                  <a:t>We frame clustering as a loss minimization problem</a:t>
+                </a:r>
+              </a:p>
+              <a:p>
+                <a:pPr lvl="1"/>
+                <a:r>
+                  <a:rPr lang="en-US" dirty="0"/>
+                  <a:t>Input:   </a:t>
+                </a:r>
+                <a14:m>
+                  <m:oMath xmlns:m="http://schemas.openxmlformats.org/officeDocument/2006/math">
+                    <m:r>
+                      <a:rPr lang="en-US" b="0" i="1" smtClean="0">
+                        <a:latin typeface="Cambria Math" panose="02040503050406030204" pitchFamily="18" charset="0"/>
+                      </a:rPr>
+                      <m:t>𝑛</m:t>
+                    </m:r>
+                    <m:r>
+                      <a:rPr lang="en-US" b="0" i="1" smtClean="0">
+                        <a:latin typeface="Cambria Math" panose="02040503050406030204" pitchFamily="18" charset="0"/>
+                      </a:rPr>
+                      <m:t> </m:t>
+                    </m:r>
+                  </m:oMath>
+                </a14:m>
+                <a:r>
+                  <a:rPr lang="en-US" dirty="0"/>
+                  <a:t>data points in </a:t>
+                </a:r>
+                <a14:m>
+                  <m:oMath xmlns:m="http://schemas.openxmlformats.org/officeDocument/2006/math">
+                    <m:sSup>
+                      <m:sSupPr>
+                        <m:ctrlPr>
+                          <a:rPr lang="en-US" b="0" i="1" smtClean="0">
+                            <a:latin typeface="Cambria Math" panose="02040503050406030204" pitchFamily="18" charset="0"/>
+                          </a:rPr>
+                        </m:ctrlPr>
+                      </m:sSupPr>
+                      <m:e>
+                        <m:r>
+                          <a:rPr lang="en-US" b="0" i="1" smtClean="0">
+                            <a:latin typeface="Cambria Math" panose="02040503050406030204" pitchFamily="18" charset="0"/>
+                          </a:rPr>
+                          <m:t>𝑅</m:t>
+                        </m:r>
+                      </m:e>
+                      <m:sup>
+                        <m:r>
+                          <a:rPr lang="en-US" b="0" i="1" smtClean="0">
+                            <a:latin typeface="Cambria Math" panose="02040503050406030204" pitchFamily="18" charset="0"/>
+                          </a:rPr>
+                          <m:t>𝑑</m:t>
+                        </m:r>
+                      </m:sup>
+                    </m:sSup>
+                  </m:oMath>
+                </a14:m>
+                <a:endParaRPr lang="en-US" dirty="0"/>
+              </a:p>
+              <a:p>
+                <a:pPr lvl="1"/>
+                <a:r>
+                  <a:rPr lang="en-US" dirty="0"/>
+                  <a:t>Goal:    assign each data point a color (red or blue, which is class labels) so that the distance between the closest pair of red and blue points is maximized </a:t>
+                </a:r>
+              </a:p>
+              <a:p>
+                <a:endParaRPr lang="en-US" dirty="0"/>
+              </a:p>
+            </p:txBody>
+          </p:sp>
+        </mc:Choice>
+        <mc:Fallback>
+          <p:sp>
+            <p:nvSpPr>
+              <p:cNvPr id="3" name="Content Placeholder 2">
+                <a:extLst>
+                  <a:ext uri="{FF2B5EF4-FFF2-40B4-BE49-F238E27FC236}">
+                    <a16:creationId xmlns:a16="http://schemas.microsoft.com/office/drawing/2014/main" id="{A0B24C07-F595-170C-7AA3-3AA89BA9F3C4}"/>
+                  </a:ext>
+                </a:extLst>
+              </p:cNvPr>
+              <p:cNvSpPr>
+                <a:spLocks noGrp="1" noRot="1" noChangeAspect="1" noMove="1" noResize="1" noEditPoints="1" noAdjustHandles="1" noChangeArrowheads="1" noChangeShapeType="1" noTextEdit="1"/>
+              </p:cNvSpPr>
+              <p:nvPr>
+                <p:ph sz="quarter" idx="1"/>
+              </p:nvPr>
+            </p:nvSpPr>
+            <p:spPr>
+              <a:blipFill>
+                <a:blip r:embed="rId2"/>
+                <a:stretch>
+                  <a:fillRect l="-500" t="-1111"/>
+                </a:stretch>
+              </a:blipFill>
+            </p:spPr>
+            <p:txBody>
+              <a:bodyPr/>
+              <a:lstStyle/>
+              <a:p>
+                <a:r>
+                  <a:rPr lang="en-US">
+                    <a:noFill/>
+                  </a:rPr>
+                  <a:t> </a:t>
+                </a:r>
+              </a:p>
+            </p:txBody>
+          </p:sp>
+        </mc:Fallback>
+      </mc:AlternateContent>
+      <p:pic>
+        <p:nvPicPr>
+          <p:cNvPr id="5" name="Picture 4">
+            <a:extLst>
+              <a:ext uri="{FF2B5EF4-FFF2-40B4-BE49-F238E27FC236}">
+                <a16:creationId xmlns:a16="http://schemas.microsoft.com/office/drawing/2014/main" id="{317976C2-FFB2-E5AB-50E9-85C4B4ACFE55}"/>
+              </a:ext>
+            </a:extLst>
+          </p:cNvPr>
+          <p:cNvPicPr>
+            <a:picLocks noChangeAspect="1"/>
+          </p:cNvPicPr>
+          <p:nvPr/>
+        </p:nvPicPr>
+        <p:blipFill>
+          <a:blip r:embed="rId3"/>
+          <a:stretch>
+            <a:fillRect/>
+          </a:stretch>
+        </p:blipFill>
+        <p:spPr>
+          <a:xfrm>
+            <a:off x="2057400" y="3852552"/>
+            <a:ext cx="2857500" cy="2019300"/>
+          </a:xfrm>
+          <a:prstGeom prst="rect">
+            <a:avLst/>
+          </a:prstGeom>
+        </p:spPr>
+      </p:pic>
+      <p:sp>
+        <p:nvSpPr>
+          <p:cNvPr id="6" name="TextBox 5">
+            <a:extLst>
+              <a:ext uri="{FF2B5EF4-FFF2-40B4-BE49-F238E27FC236}">
+                <a16:creationId xmlns:a16="http://schemas.microsoft.com/office/drawing/2014/main" id="{87FE51E0-357B-1B5D-447C-C66E589F5F19}"/>
+              </a:ext>
+            </a:extLst>
+          </p:cNvPr>
+          <p:cNvSpPr txBox="1"/>
+          <p:nvPr/>
+        </p:nvSpPr>
+        <p:spPr>
+          <a:xfrm>
+            <a:off x="2305050" y="5871852"/>
+            <a:ext cx="2362200" cy="381000"/>
+          </a:xfrm>
+          <a:prstGeom prst="rect">
+            <a:avLst/>
+          </a:prstGeom>
+          <a:noFill/>
+        </p:spPr>
+        <p:txBody>
+          <a:bodyPr wrap="square" rtlCol="0">
+            <a:spAutoFit/>
+          </a:bodyPr>
+          <a:lstStyle/>
+          <a:p>
+            <a:pPr algn="ctr"/>
+            <a:r>
+              <a:rPr lang="en-US" dirty="0"/>
+              <a:t>input points</a:t>
+            </a:r>
+          </a:p>
+        </p:txBody>
+      </p:sp>
       <p:grpSp>
         <p:nvGrpSpPr>
           <p:cNvPr id="10" name="Group 9">
             <a:extLst>
               <a:ext uri="{FF2B5EF4-FFF2-40B4-BE49-F238E27FC236}">
-                <a16:creationId xmlns:a16="http://schemas.microsoft.com/office/drawing/2014/main" id="{07DAB146-2DE1-4000-BC5B-616F716A3EE6}"/>
+                <a16:creationId xmlns:a16="http://schemas.microsoft.com/office/drawing/2014/main" id="{4E0177B9-5D52-7F8F-F443-6A5382ADC7EE}"/>
               </a:ext>
             </a:extLst>
           </p:cNvPr>
@@ -14342,7 +15315,7 @@
             <p:cNvPr id="8" name="Picture 7">
               <a:extLst>
                 <a:ext uri="{FF2B5EF4-FFF2-40B4-BE49-F238E27FC236}">
-                  <a16:creationId xmlns:a16="http://schemas.microsoft.com/office/drawing/2014/main" id="{F420E85B-60FF-4872-AF3B-22128F3FA619}"/>
+                  <a16:creationId xmlns:a16="http://schemas.microsoft.com/office/drawing/2014/main" id="{8C40F0FF-4903-505A-60B2-795047AE8154}"/>
                 </a:ext>
               </a:extLst>
             </p:cNvPr>
@@ -14372,7 +15345,7 @@
             <p:cNvPr id="9" name="TextBox 8">
               <a:extLst>
                 <a:ext uri="{FF2B5EF4-FFF2-40B4-BE49-F238E27FC236}">
-                  <a16:creationId xmlns:a16="http://schemas.microsoft.com/office/drawing/2014/main" id="{3C42775C-7AEA-4F50-A73A-6C16DECEDA5A}"/>
+                  <a16:creationId xmlns:a16="http://schemas.microsoft.com/office/drawing/2014/main" id="{68E828B7-EB0F-476A-3795-76BE17B425C1}"/>
                 </a:ext>
               </a:extLst>
             </p:cNvPr>
@@ -14411,7 +15384,7 @@
     </p:spTree>
     <p:extLst>
       <p:ext uri="{BB962C8B-B14F-4D97-AF65-F5344CB8AC3E}">
-        <p14:creationId xmlns:p14="http://schemas.microsoft.com/office/powerpoint/2010/main" val="1605359177"/>
+        <p14:creationId xmlns:p14="http://schemas.microsoft.com/office/powerpoint/2010/main" val="343693643"/>
       </p:ext>
     </p:extLst>
   </p:cSld>
@@ -14496,7 +15469,7 @@
 </p:sld>
 </file>
 
-<file path=ppt/slides/slide21.xml><?xml version="1.0" encoding="utf-8"?>
+<file path=ppt/slides/slide24.xml><?xml version="1.0" encoding="utf-8"?>
 <p:sld xmlns:a="http://schemas.openxmlformats.org/drawingml/2006/main" xmlns:r="http://schemas.openxmlformats.org/officeDocument/2006/relationships" xmlns:p="http://schemas.openxmlformats.org/presentationml/2006/main">
   <p:cSld>
     <p:spTree>
@@ -14855,7 +15828,7 @@
 </p:sld>
 </file>
 
-<file path=ppt/slides/slide22.xml><?xml version="1.0" encoding="utf-8"?>
+<file path=ppt/slides/slide25.xml><?xml version="1.0" encoding="utf-8"?>
 <p:sld xmlns:a="http://schemas.openxmlformats.org/drawingml/2006/main" xmlns:r="http://schemas.openxmlformats.org/officeDocument/2006/relationships" xmlns:p="http://schemas.openxmlformats.org/presentationml/2006/main">
   <p:cSld>
     <p:spTree>
@@ -15214,7 +16187,7 @@
 </p:sld>
 </file>
 
-<file path=ppt/slides/slide23.xml><?xml version="1.0" encoding="utf-8"?>
+<file path=ppt/slides/slide26.xml><?xml version="1.0" encoding="utf-8"?>
 <p:sld xmlns:a="http://schemas.openxmlformats.org/drawingml/2006/main" xmlns:r="http://schemas.openxmlformats.org/officeDocument/2006/relationships" xmlns:p="http://schemas.openxmlformats.org/presentationml/2006/main">
   <p:cSld>
     <p:spTree>
@@ -16068,7 +17041,7 @@
 </p:sld>
 </file>
 
-<file path=ppt/slides/slide24.xml><?xml version="1.0" encoding="utf-8"?>
+<file path=ppt/slides/slide27.xml><?xml version="1.0" encoding="utf-8"?>
 <p:sld xmlns:a="http://schemas.openxmlformats.org/drawingml/2006/main" xmlns:r="http://schemas.openxmlformats.org/officeDocument/2006/relationships" xmlns:p="http://schemas.openxmlformats.org/presentationml/2006/main">
   <p:cSld>
     <p:spTree>
@@ -16509,7 +17482,7 @@
 </p:sld>
 </file>
 
-<file path=ppt/slides/slide25.xml><?xml version="1.0" encoding="utf-8"?>
+<file path=ppt/slides/slide28.xml><?xml version="1.0" encoding="utf-8"?>
 <p:sld xmlns:a="http://schemas.openxmlformats.org/drawingml/2006/main" xmlns:r="http://schemas.openxmlformats.org/officeDocument/2006/relationships" xmlns:p="http://schemas.openxmlformats.org/presentationml/2006/main">
   <p:cSld>
     <p:spTree>
@@ -16554,8 +17527,8 @@
           </a:p>
         </p:txBody>
       </p:sp>
-      <mc:AlternateContent xmlns:mc="http://schemas.openxmlformats.org/markup-compatibility/2006">
-        <mc:Choice xmlns:a14="http://schemas.microsoft.com/office/drawing/2010/main" Requires="a14">
+      <mc:AlternateContent xmlns:mc="http://schemas.openxmlformats.org/markup-compatibility/2006" xmlns:a14="http://schemas.microsoft.com/office/drawing/2010/main">
+        <mc:Choice Requires="a14">
           <p:sp>
             <p:nvSpPr>
               <p:cNvPr id="3" name="Content Placeholder 2">
@@ -16903,7 +17876,7 @@
             </p:txBody>
           </p:sp>
         </mc:Choice>
-        <mc:Fallback>
+        <mc:Fallback xmlns="">
           <p:sp>
             <p:nvSpPr>
               <p:cNvPr id="3" name="Content Placeholder 2">
@@ -17226,7 +18199,7 @@
 </p:sld>
 </file>
 
-<file path=ppt/slides/slide26.xml><?xml version="1.0" encoding="utf-8"?>
+<file path=ppt/slides/slide29.xml><?xml version="1.0" encoding="utf-8"?>
 <p:sld xmlns:a="http://schemas.openxmlformats.org/drawingml/2006/main" xmlns:r="http://schemas.openxmlformats.org/officeDocument/2006/relationships" xmlns:p="http://schemas.openxmlformats.org/presentationml/2006/main">
   <p:cSld>
     <p:spTree>
@@ -17300,309 +18273,6 @@
     <p:extLst>
       <p:ext uri="{BB962C8B-B14F-4D97-AF65-F5344CB8AC3E}">
         <p14:creationId xmlns:p14="http://schemas.microsoft.com/office/powerpoint/2010/main" val="3997547765"/>
-      </p:ext>
-    </p:extLst>
-  </p:cSld>
-  <p:clrMapOvr>
-    <a:masterClrMapping/>
-  </p:clrMapOvr>
-</p:sld>
-</file>
-
-<file path=ppt/slides/slide27.xml><?xml version="1.0" encoding="utf-8"?>
-<p:sld xmlns:a="http://schemas.openxmlformats.org/drawingml/2006/main" xmlns:r="http://schemas.openxmlformats.org/officeDocument/2006/relationships" xmlns:p="http://schemas.openxmlformats.org/presentationml/2006/main">
-  <p:cSld>
-    <p:spTree>
-      <p:nvGrpSpPr>
-        <p:cNvPr id="1" name=""/>
-        <p:cNvGrpSpPr/>
-        <p:nvPr/>
-      </p:nvGrpSpPr>
-      <p:grpSpPr>
-        <a:xfrm>
-          <a:off x="0" y="0"/>
-          <a:ext cx="0" cy="0"/>
-          <a:chOff x="0" y="0"/>
-          <a:chExt cx="0" cy="0"/>
-        </a:xfrm>
-      </p:grpSpPr>
-      <p:sp>
-        <p:nvSpPr>
-          <p:cNvPr id="2" name="Title 1">
-            <a:extLst>
-              <a:ext uri="{FF2B5EF4-FFF2-40B4-BE49-F238E27FC236}">
-                <a16:creationId xmlns:a16="http://schemas.microsoft.com/office/drawing/2014/main" id="{764AD14C-6D94-4048-8030-AF3B00C6ADBA}"/>
-              </a:ext>
-            </a:extLst>
-          </p:cNvPr>
-          <p:cNvSpPr>
-            <a:spLocks noGrp="1"/>
-          </p:cNvSpPr>
-          <p:nvPr>
-            <p:ph type="title"/>
-          </p:nvPr>
-        </p:nvSpPr>
-        <p:spPr>
-          <a:xfrm>
-            <a:off x="1981200" y="2057400"/>
-            <a:ext cx="8229600" cy="1600200"/>
-          </a:xfrm>
-        </p:spPr>
-        <p:txBody>
-          <a:bodyPr/>
-          <a:lstStyle/>
-          <a:p>
-            <a:pPr algn="ctr"/>
-            <a:r>
-              <a:rPr lang="en-US" sz="3600" dirty="0"/>
-              <a:t>Hierarchical clustering, and single linkage clustering algorithm</a:t>
-            </a:r>
-            <a:br>
-              <a:rPr lang="en-US" sz="3600" dirty="0"/>
-            </a:br>
-            <a:r>
-              <a:rPr lang="en-US" sz="3600" dirty="0"/>
-              <a:t>(Optional) </a:t>
-            </a:r>
-          </a:p>
-        </p:txBody>
-      </p:sp>
-    </p:spTree>
-    <p:extLst>
-      <p:ext uri="{BB962C8B-B14F-4D97-AF65-F5344CB8AC3E}">
-        <p14:creationId xmlns:p14="http://schemas.microsoft.com/office/powerpoint/2010/main" val="642240400"/>
-      </p:ext>
-    </p:extLst>
-  </p:cSld>
-  <p:clrMapOvr>
-    <a:masterClrMapping/>
-  </p:clrMapOvr>
-</p:sld>
-</file>
-
-<file path=ppt/slides/slide28.xml><?xml version="1.0" encoding="utf-8"?>
-<p:sld xmlns:a="http://schemas.openxmlformats.org/drawingml/2006/main" xmlns:r="http://schemas.openxmlformats.org/officeDocument/2006/relationships" xmlns:p="http://schemas.openxmlformats.org/presentationml/2006/main">
-  <p:cSld>
-    <p:spTree>
-      <p:nvGrpSpPr>
-        <p:cNvPr id="1" name=""/>
-        <p:cNvGrpSpPr/>
-        <p:nvPr/>
-      </p:nvGrpSpPr>
-      <p:grpSpPr>
-        <a:xfrm>
-          <a:off x="0" y="0"/>
-          <a:ext cx="0" cy="0"/>
-          <a:chOff x="0" y="0"/>
-          <a:chExt cx="0" cy="0"/>
-        </a:xfrm>
-      </p:grpSpPr>
-      <p:sp>
-        <p:nvSpPr>
-          <p:cNvPr id="2" name="Title 1"/>
-          <p:cNvSpPr>
-            <a:spLocks noGrp="1"/>
-          </p:cNvSpPr>
-          <p:nvPr>
-            <p:ph type="title"/>
-          </p:nvPr>
-        </p:nvSpPr>
-        <p:spPr/>
-        <p:txBody>
-          <a:bodyPr/>
-          <a:lstStyle/>
-          <a:p>
-            <a:r>
-              <a:rPr lang="en-US" dirty="0"/>
-              <a:t>Clustering</a:t>
-            </a:r>
-          </a:p>
-        </p:txBody>
-      </p:sp>
-      <p:sp>
-        <p:nvSpPr>
-          <p:cNvPr id="3" name="Content Placeholder 2"/>
-          <p:cNvSpPr>
-            <a:spLocks noGrp="1"/>
-          </p:cNvSpPr>
-          <p:nvPr>
-            <p:ph sz="quarter" idx="1"/>
-          </p:nvPr>
-        </p:nvSpPr>
-        <p:spPr/>
-        <p:txBody>
-          <a:bodyPr/>
-          <a:lstStyle/>
-          <a:p>
-            <a:r>
-              <a:rPr lang="en-US" dirty="0"/>
-              <a:t> </a:t>
-            </a:r>
-          </a:p>
-          <a:p>
-            <a:endParaRPr lang="en-US" dirty="0"/>
-          </a:p>
-          <a:p>
-            <a:endParaRPr lang="en-US" dirty="0"/>
-          </a:p>
-          <a:p>
-            <a:pPr marL="0" indent="0">
-              <a:buNone/>
-            </a:pPr>
-            <a:endParaRPr lang="en-US" dirty="0"/>
-          </a:p>
-        </p:txBody>
-      </p:sp>
-      <p:pic>
-        <p:nvPicPr>
-          <p:cNvPr id="4" name="Picture 3"/>
-          <p:cNvPicPr>
-            <a:picLocks noChangeAspect="1"/>
-          </p:cNvPicPr>
-          <p:nvPr/>
-        </p:nvPicPr>
-        <p:blipFill>
-          <a:blip r:embed="rId2">
-            <a:extLst>
-              <a:ext uri="{28A0092B-C50C-407E-A947-70E740481C1C}">
-                <a14:useLocalDpi xmlns:a14="http://schemas.microsoft.com/office/drawing/2010/main" val="0"/>
-              </a:ext>
-            </a:extLst>
-          </a:blip>
-          <a:stretch>
-            <a:fillRect/>
-          </a:stretch>
-        </p:blipFill>
-        <p:spPr>
-          <a:xfrm>
-            <a:off x="5176709" y="2595446"/>
-            <a:ext cx="1838582" cy="1667108"/>
-          </a:xfrm>
-          <a:prstGeom prst="rect">
-            <a:avLst/>
-          </a:prstGeom>
-        </p:spPr>
-      </p:pic>
-    </p:spTree>
-    <p:extLst>
-      <p:ext uri="{BB962C8B-B14F-4D97-AF65-F5344CB8AC3E}">
-        <p14:creationId xmlns:p14="http://schemas.microsoft.com/office/powerpoint/2010/main" val="2004260075"/>
-      </p:ext>
-    </p:extLst>
-  </p:cSld>
-  <p:clrMapOvr>
-    <a:masterClrMapping/>
-  </p:clrMapOvr>
-</p:sld>
-</file>
-
-<file path=ppt/slides/slide29.xml><?xml version="1.0" encoding="utf-8"?>
-<p:sld xmlns:a="http://schemas.openxmlformats.org/drawingml/2006/main" xmlns:r="http://schemas.openxmlformats.org/officeDocument/2006/relationships" xmlns:p="http://schemas.openxmlformats.org/presentationml/2006/main">
-  <p:cSld>
-    <p:spTree>
-      <p:nvGrpSpPr>
-        <p:cNvPr id="1" name=""/>
-        <p:cNvGrpSpPr/>
-        <p:nvPr/>
-      </p:nvGrpSpPr>
-      <p:grpSpPr>
-        <a:xfrm>
-          <a:off x="0" y="0"/>
-          <a:ext cx="0" cy="0"/>
-          <a:chOff x="0" y="0"/>
-          <a:chExt cx="0" cy="0"/>
-        </a:xfrm>
-      </p:grpSpPr>
-      <p:sp>
-        <p:nvSpPr>
-          <p:cNvPr id="2" name="Title 1"/>
-          <p:cNvSpPr>
-            <a:spLocks noGrp="1"/>
-          </p:cNvSpPr>
-          <p:nvPr>
-            <p:ph type="title"/>
-          </p:nvPr>
-        </p:nvSpPr>
-        <p:spPr/>
-        <p:txBody>
-          <a:bodyPr/>
-          <a:lstStyle/>
-          <a:p>
-            <a:r>
-              <a:rPr lang="en-US" dirty="0"/>
-              <a:t>Clustering</a:t>
-            </a:r>
-          </a:p>
-        </p:txBody>
-      </p:sp>
-      <p:sp>
-        <p:nvSpPr>
-          <p:cNvPr id="3" name="Content Placeholder 2"/>
-          <p:cNvSpPr>
-            <a:spLocks noGrp="1"/>
-          </p:cNvSpPr>
-          <p:nvPr>
-            <p:ph sz="quarter" idx="1"/>
-          </p:nvPr>
-        </p:nvSpPr>
-        <p:spPr/>
-        <p:txBody>
-          <a:bodyPr/>
-          <a:lstStyle/>
-          <a:p>
-            <a:r>
-              <a:rPr lang="en-US" dirty="0"/>
-              <a:t> </a:t>
-            </a:r>
-          </a:p>
-          <a:p>
-            <a:endParaRPr lang="en-US" dirty="0"/>
-          </a:p>
-          <a:p>
-            <a:endParaRPr lang="en-US" dirty="0"/>
-          </a:p>
-          <a:p>
-            <a:pPr marL="0" indent="0">
-              <a:buNone/>
-            </a:pPr>
-            <a:endParaRPr lang="en-US" dirty="0"/>
-          </a:p>
-        </p:txBody>
-      </p:sp>
-      <p:pic>
-        <p:nvPicPr>
-          <p:cNvPr id="5" name="Picture 4"/>
-          <p:cNvPicPr>
-            <a:picLocks noChangeAspect="1"/>
-          </p:cNvPicPr>
-          <p:nvPr/>
-        </p:nvPicPr>
-        <p:blipFill>
-          <a:blip r:embed="rId2">
-            <a:extLst>
-              <a:ext uri="{28A0092B-C50C-407E-A947-70E740481C1C}">
-                <a14:useLocalDpi xmlns:a14="http://schemas.microsoft.com/office/drawing/2010/main" val="0"/>
-              </a:ext>
-            </a:extLst>
-          </a:blip>
-          <a:stretch>
-            <a:fillRect/>
-          </a:stretch>
-        </p:blipFill>
-        <p:spPr>
-          <a:xfrm>
-            <a:off x="4995709" y="2504946"/>
-            <a:ext cx="2200582" cy="1848108"/>
-          </a:xfrm>
-          <a:prstGeom prst="rect">
-            <a:avLst/>
-          </a:prstGeom>
-        </p:spPr>
-      </p:pic>
-    </p:spTree>
-    <p:extLst>
-      <p:ext uri="{BB962C8B-B14F-4D97-AF65-F5344CB8AC3E}">
-        <p14:creationId xmlns:p14="http://schemas.microsoft.com/office/powerpoint/2010/main" val="1508876033"/>
       </p:ext>
     </p:extLst>
   </p:cSld>
@@ -17695,6 +18365,309 @@
       </p:grpSpPr>
       <p:sp>
         <p:nvSpPr>
+          <p:cNvPr id="2" name="Title 1">
+            <a:extLst>
+              <a:ext uri="{FF2B5EF4-FFF2-40B4-BE49-F238E27FC236}">
+                <a16:creationId xmlns:a16="http://schemas.microsoft.com/office/drawing/2014/main" id="{764AD14C-6D94-4048-8030-AF3B00C6ADBA}"/>
+              </a:ext>
+            </a:extLst>
+          </p:cNvPr>
+          <p:cNvSpPr>
+            <a:spLocks noGrp="1"/>
+          </p:cNvSpPr>
+          <p:nvPr>
+            <p:ph type="title"/>
+          </p:nvPr>
+        </p:nvSpPr>
+        <p:spPr>
+          <a:xfrm>
+            <a:off x="1981200" y="2057400"/>
+            <a:ext cx="8229600" cy="1600200"/>
+          </a:xfrm>
+        </p:spPr>
+        <p:txBody>
+          <a:bodyPr/>
+          <a:lstStyle/>
+          <a:p>
+            <a:pPr algn="ctr"/>
+            <a:r>
+              <a:rPr lang="en-US" sz="3600" dirty="0"/>
+              <a:t>Hierarchical clustering, and single linkage clustering algorithm</a:t>
+            </a:r>
+            <a:br>
+              <a:rPr lang="en-US" sz="3600" dirty="0"/>
+            </a:br>
+            <a:r>
+              <a:rPr lang="en-US" sz="3600" dirty="0"/>
+              <a:t>(Optional) </a:t>
+            </a:r>
+          </a:p>
+        </p:txBody>
+      </p:sp>
+    </p:spTree>
+    <p:extLst>
+      <p:ext uri="{BB962C8B-B14F-4D97-AF65-F5344CB8AC3E}">
+        <p14:creationId xmlns:p14="http://schemas.microsoft.com/office/powerpoint/2010/main" val="642240400"/>
+      </p:ext>
+    </p:extLst>
+  </p:cSld>
+  <p:clrMapOvr>
+    <a:masterClrMapping/>
+  </p:clrMapOvr>
+</p:sld>
+</file>
+
+<file path=ppt/slides/slide31.xml><?xml version="1.0" encoding="utf-8"?>
+<p:sld xmlns:a="http://schemas.openxmlformats.org/drawingml/2006/main" xmlns:r="http://schemas.openxmlformats.org/officeDocument/2006/relationships" xmlns:p="http://schemas.openxmlformats.org/presentationml/2006/main">
+  <p:cSld>
+    <p:spTree>
+      <p:nvGrpSpPr>
+        <p:cNvPr id="1" name=""/>
+        <p:cNvGrpSpPr/>
+        <p:nvPr/>
+      </p:nvGrpSpPr>
+      <p:grpSpPr>
+        <a:xfrm>
+          <a:off x="0" y="0"/>
+          <a:ext cx="0" cy="0"/>
+          <a:chOff x="0" y="0"/>
+          <a:chExt cx="0" cy="0"/>
+        </a:xfrm>
+      </p:grpSpPr>
+      <p:sp>
+        <p:nvSpPr>
+          <p:cNvPr id="2" name="Title 1"/>
+          <p:cNvSpPr>
+            <a:spLocks noGrp="1"/>
+          </p:cNvSpPr>
+          <p:nvPr>
+            <p:ph type="title"/>
+          </p:nvPr>
+        </p:nvSpPr>
+        <p:spPr/>
+        <p:txBody>
+          <a:bodyPr/>
+          <a:lstStyle/>
+          <a:p>
+            <a:r>
+              <a:rPr lang="en-US" dirty="0"/>
+              <a:t>Clustering</a:t>
+            </a:r>
+          </a:p>
+        </p:txBody>
+      </p:sp>
+      <p:sp>
+        <p:nvSpPr>
+          <p:cNvPr id="3" name="Content Placeholder 2"/>
+          <p:cNvSpPr>
+            <a:spLocks noGrp="1"/>
+          </p:cNvSpPr>
+          <p:nvPr>
+            <p:ph sz="quarter" idx="1"/>
+          </p:nvPr>
+        </p:nvSpPr>
+        <p:spPr/>
+        <p:txBody>
+          <a:bodyPr/>
+          <a:lstStyle/>
+          <a:p>
+            <a:r>
+              <a:rPr lang="en-US" dirty="0"/>
+              <a:t> </a:t>
+            </a:r>
+          </a:p>
+          <a:p>
+            <a:endParaRPr lang="en-US" dirty="0"/>
+          </a:p>
+          <a:p>
+            <a:endParaRPr lang="en-US" dirty="0"/>
+          </a:p>
+          <a:p>
+            <a:pPr marL="0" indent="0">
+              <a:buNone/>
+            </a:pPr>
+            <a:endParaRPr lang="en-US" dirty="0"/>
+          </a:p>
+        </p:txBody>
+      </p:sp>
+      <p:pic>
+        <p:nvPicPr>
+          <p:cNvPr id="4" name="Picture 3"/>
+          <p:cNvPicPr>
+            <a:picLocks noChangeAspect="1"/>
+          </p:cNvPicPr>
+          <p:nvPr/>
+        </p:nvPicPr>
+        <p:blipFill>
+          <a:blip r:embed="rId2">
+            <a:extLst>
+              <a:ext uri="{28A0092B-C50C-407E-A947-70E740481C1C}">
+                <a14:useLocalDpi xmlns:a14="http://schemas.microsoft.com/office/drawing/2010/main" val="0"/>
+              </a:ext>
+            </a:extLst>
+          </a:blip>
+          <a:stretch>
+            <a:fillRect/>
+          </a:stretch>
+        </p:blipFill>
+        <p:spPr>
+          <a:xfrm>
+            <a:off x="5176709" y="2595446"/>
+            <a:ext cx="1838582" cy="1667108"/>
+          </a:xfrm>
+          <a:prstGeom prst="rect">
+            <a:avLst/>
+          </a:prstGeom>
+        </p:spPr>
+      </p:pic>
+    </p:spTree>
+    <p:extLst>
+      <p:ext uri="{BB962C8B-B14F-4D97-AF65-F5344CB8AC3E}">
+        <p14:creationId xmlns:p14="http://schemas.microsoft.com/office/powerpoint/2010/main" val="2004260075"/>
+      </p:ext>
+    </p:extLst>
+  </p:cSld>
+  <p:clrMapOvr>
+    <a:masterClrMapping/>
+  </p:clrMapOvr>
+</p:sld>
+</file>
+
+<file path=ppt/slides/slide32.xml><?xml version="1.0" encoding="utf-8"?>
+<p:sld xmlns:a="http://schemas.openxmlformats.org/drawingml/2006/main" xmlns:r="http://schemas.openxmlformats.org/officeDocument/2006/relationships" xmlns:p="http://schemas.openxmlformats.org/presentationml/2006/main">
+  <p:cSld>
+    <p:spTree>
+      <p:nvGrpSpPr>
+        <p:cNvPr id="1" name=""/>
+        <p:cNvGrpSpPr/>
+        <p:nvPr/>
+      </p:nvGrpSpPr>
+      <p:grpSpPr>
+        <a:xfrm>
+          <a:off x="0" y="0"/>
+          <a:ext cx="0" cy="0"/>
+          <a:chOff x="0" y="0"/>
+          <a:chExt cx="0" cy="0"/>
+        </a:xfrm>
+      </p:grpSpPr>
+      <p:sp>
+        <p:nvSpPr>
+          <p:cNvPr id="2" name="Title 1"/>
+          <p:cNvSpPr>
+            <a:spLocks noGrp="1"/>
+          </p:cNvSpPr>
+          <p:nvPr>
+            <p:ph type="title"/>
+          </p:nvPr>
+        </p:nvSpPr>
+        <p:spPr/>
+        <p:txBody>
+          <a:bodyPr/>
+          <a:lstStyle/>
+          <a:p>
+            <a:r>
+              <a:rPr lang="en-US" dirty="0"/>
+              <a:t>Clustering</a:t>
+            </a:r>
+          </a:p>
+        </p:txBody>
+      </p:sp>
+      <p:sp>
+        <p:nvSpPr>
+          <p:cNvPr id="3" name="Content Placeholder 2"/>
+          <p:cNvSpPr>
+            <a:spLocks noGrp="1"/>
+          </p:cNvSpPr>
+          <p:nvPr>
+            <p:ph sz="quarter" idx="1"/>
+          </p:nvPr>
+        </p:nvSpPr>
+        <p:spPr/>
+        <p:txBody>
+          <a:bodyPr/>
+          <a:lstStyle/>
+          <a:p>
+            <a:r>
+              <a:rPr lang="en-US" dirty="0"/>
+              <a:t> </a:t>
+            </a:r>
+          </a:p>
+          <a:p>
+            <a:endParaRPr lang="en-US" dirty="0"/>
+          </a:p>
+          <a:p>
+            <a:endParaRPr lang="en-US" dirty="0"/>
+          </a:p>
+          <a:p>
+            <a:pPr marL="0" indent="0">
+              <a:buNone/>
+            </a:pPr>
+            <a:endParaRPr lang="en-US" dirty="0"/>
+          </a:p>
+        </p:txBody>
+      </p:sp>
+      <p:pic>
+        <p:nvPicPr>
+          <p:cNvPr id="5" name="Picture 4"/>
+          <p:cNvPicPr>
+            <a:picLocks noChangeAspect="1"/>
+          </p:cNvPicPr>
+          <p:nvPr/>
+        </p:nvPicPr>
+        <p:blipFill>
+          <a:blip r:embed="rId2">
+            <a:extLst>
+              <a:ext uri="{28A0092B-C50C-407E-A947-70E740481C1C}">
+                <a14:useLocalDpi xmlns:a14="http://schemas.microsoft.com/office/drawing/2010/main" val="0"/>
+              </a:ext>
+            </a:extLst>
+          </a:blip>
+          <a:stretch>
+            <a:fillRect/>
+          </a:stretch>
+        </p:blipFill>
+        <p:spPr>
+          <a:xfrm>
+            <a:off x="4995709" y="2504946"/>
+            <a:ext cx="2200582" cy="1848108"/>
+          </a:xfrm>
+          <a:prstGeom prst="rect">
+            <a:avLst/>
+          </a:prstGeom>
+        </p:spPr>
+      </p:pic>
+    </p:spTree>
+    <p:extLst>
+      <p:ext uri="{BB962C8B-B14F-4D97-AF65-F5344CB8AC3E}">
+        <p14:creationId xmlns:p14="http://schemas.microsoft.com/office/powerpoint/2010/main" val="1508876033"/>
+      </p:ext>
+    </p:extLst>
+  </p:cSld>
+  <p:clrMapOvr>
+    <a:masterClrMapping/>
+  </p:clrMapOvr>
+</p:sld>
+</file>
+
+<file path=ppt/slides/slide33.xml><?xml version="1.0" encoding="utf-8"?>
+<p:sld xmlns:a="http://schemas.openxmlformats.org/drawingml/2006/main" xmlns:r="http://schemas.openxmlformats.org/officeDocument/2006/relationships" xmlns:p="http://schemas.openxmlformats.org/presentationml/2006/main">
+  <p:cSld>
+    <p:spTree>
+      <p:nvGrpSpPr>
+        <p:cNvPr id="1" name=""/>
+        <p:cNvGrpSpPr/>
+        <p:nvPr/>
+      </p:nvGrpSpPr>
+      <p:grpSpPr>
+        <a:xfrm>
+          <a:off x="0" y="0"/>
+          <a:ext cx="0" cy="0"/>
+          <a:chOff x="0" y="0"/>
+          <a:chExt cx="0" cy="0"/>
+        </a:xfrm>
+      </p:grpSpPr>
+      <p:sp>
+        <p:nvSpPr>
           <p:cNvPr id="2" name="Title 1"/>
           <p:cNvSpPr>
             <a:spLocks noGrp="1"/>
@@ -17786,7 +18759,7 @@
 </p:sld>
 </file>
 
-<file path=ppt/slides/slide31.xml><?xml version="1.0" encoding="utf-8"?>
+<file path=ppt/slides/slide34.xml><?xml version="1.0" encoding="utf-8"?>
 <p:sld xmlns:a="http://schemas.openxmlformats.org/drawingml/2006/main" xmlns:r="http://schemas.openxmlformats.org/officeDocument/2006/relationships" xmlns:p="http://schemas.openxmlformats.org/presentationml/2006/main">
   <p:cSld>
     <p:spTree>
@@ -17896,7 +18869,7 @@
 </p:sld>
 </file>
 
-<file path=ppt/slides/slide32.xml><?xml version="1.0" encoding="utf-8"?>
+<file path=ppt/slides/slide35.xml><?xml version="1.0" encoding="utf-8"?>
 <p:sld xmlns:a="http://schemas.openxmlformats.org/drawingml/2006/main" xmlns:r="http://schemas.openxmlformats.org/officeDocument/2006/relationships" xmlns:p="http://schemas.openxmlformats.org/presentationml/2006/main">
   <p:cSld>
     <p:spTree>
@@ -18006,7 +18979,7 @@
 </p:sld>
 </file>
 
-<file path=ppt/slides/slide33.xml><?xml version="1.0" encoding="utf-8"?>
+<file path=ppt/slides/slide36.xml><?xml version="1.0" encoding="utf-8"?>
 <p:sld xmlns:a="http://schemas.openxmlformats.org/drawingml/2006/main" xmlns:r="http://schemas.openxmlformats.org/officeDocument/2006/relationships" xmlns:p="http://schemas.openxmlformats.org/presentationml/2006/main">
   <p:cSld>
     <p:spTree>
@@ -18116,7 +19089,7 @@
 </p:sld>
 </file>
 
-<file path=ppt/slides/slide34.xml><?xml version="1.0" encoding="utf-8"?>
+<file path=ppt/slides/slide37.xml><?xml version="1.0" encoding="utf-8"?>
 <p:sld xmlns:a="http://schemas.openxmlformats.org/drawingml/2006/main" xmlns:r="http://schemas.openxmlformats.org/officeDocument/2006/relationships" xmlns:p="http://schemas.openxmlformats.org/presentationml/2006/main">
   <p:cSld>
     <p:spTree>
@@ -18226,7 +19199,7 @@
 </p:sld>
 </file>
 
-<file path=ppt/slides/slide35.xml><?xml version="1.0" encoding="utf-8"?>
+<file path=ppt/slides/slide38.xml><?xml version="1.0" encoding="utf-8"?>
 <p:sld xmlns:a="http://schemas.openxmlformats.org/drawingml/2006/main" xmlns:r="http://schemas.openxmlformats.org/officeDocument/2006/relationships" xmlns:p="http://schemas.openxmlformats.org/presentationml/2006/main">
   <p:cSld>
     <p:spTree>
@@ -18417,7 +19390,7 @@
 </p:sld>
 </file>
 
-<file path=ppt/slides/slide36.xml><?xml version="1.0" encoding="utf-8"?>
+<file path=ppt/slides/slide39.xml><?xml version="1.0" encoding="utf-8"?>
 <p:sld xmlns:a="http://schemas.openxmlformats.org/drawingml/2006/main" xmlns:r="http://schemas.openxmlformats.org/officeDocument/2006/relationships" xmlns:p="http://schemas.openxmlformats.org/presentationml/2006/main">
   <p:cSld>
     <p:spTree>
@@ -18652,600 +19625,6 @@
   <p:clrMapOvr>
     <a:masterClrMapping/>
   </p:clrMapOvr>
-</p:sld>
-</file>
-
-<file path=ppt/slides/slide37.xml><?xml version="1.0" encoding="utf-8"?>
-<p:sld xmlns:a="http://schemas.openxmlformats.org/drawingml/2006/main" xmlns:r="http://schemas.openxmlformats.org/officeDocument/2006/relationships" xmlns:p="http://schemas.openxmlformats.org/presentationml/2006/main">
-  <p:cSld>
-    <p:spTree>
-      <p:nvGrpSpPr>
-        <p:cNvPr id="1" name=""/>
-        <p:cNvGrpSpPr/>
-        <p:nvPr/>
-      </p:nvGrpSpPr>
-      <p:grpSpPr>
-        <a:xfrm>
-          <a:off x="0" y="0"/>
-          <a:ext cx="0" cy="0"/>
-          <a:chOff x="0" y="0"/>
-          <a:chExt cx="0" cy="0"/>
-        </a:xfrm>
-      </p:grpSpPr>
-      <p:sp>
-        <p:nvSpPr>
-          <p:cNvPr id="2" name="Title 1"/>
-          <p:cNvSpPr>
-            <a:spLocks noGrp="1"/>
-          </p:cNvSpPr>
-          <p:nvPr>
-            <p:ph type="title"/>
-          </p:nvPr>
-        </p:nvSpPr>
-        <p:spPr/>
-        <p:txBody>
-          <a:bodyPr/>
-          <a:lstStyle/>
-          <a:p>
-            <a:r>
-              <a:rPr lang="en-US" dirty="0"/>
-              <a:t>Single Linkage Clustering</a:t>
-            </a:r>
-          </a:p>
-        </p:txBody>
-      </p:sp>
-      <p:sp>
-        <p:nvSpPr>
-          <p:cNvPr id="3" name="Content Placeholder 2"/>
-          <p:cNvSpPr>
-            <a:spLocks noGrp="1"/>
-          </p:cNvSpPr>
-          <p:nvPr>
-            <p:ph sz="quarter" idx="1"/>
-          </p:nvPr>
-        </p:nvSpPr>
-        <p:spPr/>
-        <p:txBody>
-          <a:bodyPr/>
-          <a:lstStyle/>
-          <a:p>
-            <a:r>
-              <a:rPr lang="en-US" dirty="0"/>
-              <a:t>Starting with each data point as a single cluster</a:t>
-            </a:r>
-          </a:p>
-          <a:p>
-            <a:r>
-              <a:rPr lang="en-US" dirty="0"/>
-              <a:t>Keep merging clusters based on nearest distance between points from their members</a:t>
-            </a:r>
-          </a:p>
-          <a:p>
-            <a:endParaRPr lang="en-US" dirty="0"/>
-          </a:p>
-        </p:txBody>
-      </p:sp>
-      <p:pic>
-        <p:nvPicPr>
-          <p:cNvPr id="4" name="Picture 3"/>
-          <p:cNvPicPr>
-            <a:picLocks noChangeAspect="1"/>
-          </p:cNvPicPr>
-          <p:nvPr/>
-        </p:nvPicPr>
-        <p:blipFill>
-          <a:blip r:embed="rId2">
-            <a:extLst>
-              <a:ext uri="{28A0092B-C50C-407E-A947-70E740481C1C}">
-                <a14:useLocalDpi xmlns:a14="http://schemas.microsoft.com/office/drawing/2010/main" val="0"/>
-              </a:ext>
-            </a:extLst>
-          </a:blip>
-          <a:stretch>
-            <a:fillRect/>
-          </a:stretch>
-        </p:blipFill>
-        <p:spPr>
-          <a:xfrm>
-            <a:off x="1828801" y="3962401"/>
-            <a:ext cx="4496427" cy="1524213"/>
-          </a:xfrm>
-          <a:prstGeom prst="rect">
-            <a:avLst/>
-          </a:prstGeom>
-        </p:spPr>
-      </p:pic>
-    </p:spTree>
-    <p:extLst>
-      <p:ext uri="{BB962C8B-B14F-4D97-AF65-F5344CB8AC3E}">
-        <p14:creationId xmlns:p14="http://schemas.microsoft.com/office/powerpoint/2010/main" val="674210729"/>
-      </p:ext>
-    </p:extLst>
-  </p:cSld>
-  <p:clrMapOvr>
-    <a:masterClrMapping/>
-  </p:clrMapOvr>
-</p:sld>
-</file>
-
-<file path=ppt/slides/slide38.xml><?xml version="1.0" encoding="utf-8"?>
-<p:sld xmlns:a="http://schemas.openxmlformats.org/drawingml/2006/main" xmlns:r="http://schemas.openxmlformats.org/officeDocument/2006/relationships" xmlns:p="http://schemas.openxmlformats.org/presentationml/2006/main">
-  <p:cSld>
-    <p:spTree>
-      <p:nvGrpSpPr>
-        <p:cNvPr id="1" name=""/>
-        <p:cNvGrpSpPr/>
-        <p:nvPr/>
-      </p:nvGrpSpPr>
-      <p:grpSpPr>
-        <a:xfrm>
-          <a:off x="0" y="0"/>
-          <a:ext cx="0" cy="0"/>
-          <a:chOff x="0" y="0"/>
-          <a:chExt cx="0" cy="0"/>
-        </a:xfrm>
-      </p:grpSpPr>
-      <p:sp>
-        <p:nvSpPr>
-          <p:cNvPr id="2" name="Title 1"/>
-          <p:cNvSpPr>
-            <a:spLocks noGrp="1"/>
-          </p:cNvSpPr>
-          <p:nvPr>
-            <p:ph type="title"/>
-          </p:nvPr>
-        </p:nvSpPr>
-        <p:spPr/>
-        <p:txBody>
-          <a:bodyPr/>
-          <a:lstStyle/>
-          <a:p>
-            <a:r>
-              <a:rPr lang="en-US" dirty="0"/>
-              <a:t>Single Linkage Clustering</a:t>
-            </a:r>
-          </a:p>
-        </p:txBody>
-      </p:sp>
-      <p:sp>
-        <p:nvSpPr>
-          <p:cNvPr id="3" name="Content Placeholder 2"/>
-          <p:cNvSpPr>
-            <a:spLocks noGrp="1"/>
-          </p:cNvSpPr>
-          <p:nvPr>
-            <p:ph sz="quarter" idx="1"/>
-          </p:nvPr>
-        </p:nvSpPr>
-        <p:spPr/>
-        <p:txBody>
-          <a:bodyPr/>
-          <a:lstStyle/>
-          <a:p>
-            <a:r>
-              <a:rPr lang="en-US" dirty="0"/>
-              <a:t>Starting with each data point as a single cluster</a:t>
-            </a:r>
-          </a:p>
-          <a:p>
-            <a:r>
-              <a:rPr lang="en-US" dirty="0"/>
-              <a:t>Keep merging clusters based on nearest distance between points from their members</a:t>
-            </a:r>
-          </a:p>
-          <a:p>
-            <a:endParaRPr lang="en-US" dirty="0"/>
-          </a:p>
-        </p:txBody>
-      </p:sp>
-      <p:pic>
-        <p:nvPicPr>
-          <p:cNvPr id="5" name="Picture 4"/>
-          <p:cNvPicPr>
-            <a:picLocks noChangeAspect="1"/>
-          </p:cNvPicPr>
-          <p:nvPr/>
-        </p:nvPicPr>
-        <p:blipFill>
-          <a:blip r:embed="rId2">
-            <a:extLst>
-              <a:ext uri="{28A0092B-C50C-407E-A947-70E740481C1C}">
-                <a14:useLocalDpi xmlns:a14="http://schemas.microsoft.com/office/drawing/2010/main" val="0"/>
-              </a:ext>
-            </a:extLst>
-          </a:blip>
-          <a:stretch>
-            <a:fillRect/>
-          </a:stretch>
-        </p:blipFill>
-        <p:spPr>
-          <a:xfrm>
-            <a:off x="1839687" y="4038601"/>
-            <a:ext cx="4496427" cy="1524213"/>
-          </a:xfrm>
-          <a:prstGeom prst="rect">
-            <a:avLst/>
-          </a:prstGeom>
-        </p:spPr>
-      </p:pic>
-    </p:spTree>
-    <p:extLst>
-      <p:ext uri="{BB962C8B-B14F-4D97-AF65-F5344CB8AC3E}">
-        <p14:creationId xmlns:p14="http://schemas.microsoft.com/office/powerpoint/2010/main" val="830583734"/>
-      </p:ext>
-    </p:extLst>
-  </p:cSld>
-  <p:clrMapOvr>
-    <a:masterClrMapping/>
-  </p:clrMapOvr>
-</p:sld>
-</file>
-
-<file path=ppt/slides/slide39.xml><?xml version="1.0" encoding="utf-8"?>
-<p:sld xmlns:a="http://schemas.openxmlformats.org/drawingml/2006/main" xmlns:r="http://schemas.openxmlformats.org/officeDocument/2006/relationships" xmlns:p="http://schemas.openxmlformats.org/presentationml/2006/main">
-  <p:cSld>
-    <p:spTree>
-      <p:nvGrpSpPr>
-        <p:cNvPr id="1" name=""/>
-        <p:cNvGrpSpPr/>
-        <p:nvPr/>
-      </p:nvGrpSpPr>
-      <p:grpSpPr>
-        <a:xfrm>
-          <a:off x="0" y="0"/>
-          <a:ext cx="0" cy="0"/>
-          <a:chOff x="0" y="0"/>
-          <a:chExt cx="0" cy="0"/>
-        </a:xfrm>
-      </p:grpSpPr>
-      <p:sp>
-        <p:nvSpPr>
-          <p:cNvPr id="2" name="Title 1"/>
-          <p:cNvSpPr>
-            <a:spLocks noGrp="1"/>
-          </p:cNvSpPr>
-          <p:nvPr>
-            <p:ph type="title"/>
-          </p:nvPr>
-        </p:nvSpPr>
-        <p:spPr/>
-        <p:txBody>
-          <a:bodyPr/>
-          <a:lstStyle/>
-          <a:p>
-            <a:r>
-              <a:rPr lang="en-US" dirty="0"/>
-              <a:t>Single Linkage Clustering</a:t>
-            </a:r>
-          </a:p>
-        </p:txBody>
-      </p:sp>
-      <p:sp>
-        <p:nvSpPr>
-          <p:cNvPr id="3" name="Content Placeholder 2"/>
-          <p:cNvSpPr>
-            <a:spLocks noGrp="1"/>
-          </p:cNvSpPr>
-          <p:nvPr>
-            <p:ph sz="quarter" idx="1"/>
-          </p:nvPr>
-        </p:nvSpPr>
-        <p:spPr/>
-        <p:txBody>
-          <a:bodyPr/>
-          <a:lstStyle/>
-          <a:p>
-            <a:r>
-              <a:rPr lang="en-US" dirty="0"/>
-              <a:t>Starting with each data point as a single cluster</a:t>
-            </a:r>
-          </a:p>
-          <a:p>
-            <a:r>
-              <a:rPr lang="en-US" dirty="0"/>
-              <a:t>Keep merging clusters based on nearest distance between points from their members</a:t>
-            </a:r>
-          </a:p>
-          <a:p>
-            <a:endParaRPr lang="en-US" dirty="0"/>
-          </a:p>
-        </p:txBody>
-      </p:sp>
-      <p:pic>
-        <p:nvPicPr>
-          <p:cNvPr id="4" name="Picture 3"/>
-          <p:cNvPicPr>
-            <a:picLocks noChangeAspect="1"/>
-          </p:cNvPicPr>
-          <p:nvPr/>
-        </p:nvPicPr>
-        <p:blipFill>
-          <a:blip r:embed="rId2">
-            <a:extLst>
-              <a:ext uri="{28A0092B-C50C-407E-A947-70E740481C1C}">
-                <a14:useLocalDpi xmlns:a14="http://schemas.microsoft.com/office/drawing/2010/main" val="0"/>
-              </a:ext>
-            </a:extLst>
-          </a:blip>
-          <a:stretch>
-            <a:fillRect/>
-          </a:stretch>
-        </p:blipFill>
-        <p:spPr>
-          <a:xfrm>
-            <a:off x="1828801" y="4038814"/>
-            <a:ext cx="4496427" cy="1524213"/>
-          </a:xfrm>
-          <a:prstGeom prst="rect">
-            <a:avLst/>
-          </a:prstGeom>
-        </p:spPr>
-      </p:pic>
-      <p:pic>
-        <p:nvPicPr>
-          <p:cNvPr id="6" name="Picture 5"/>
-          <p:cNvPicPr>
-            <a:picLocks noChangeAspect="1"/>
-          </p:cNvPicPr>
-          <p:nvPr/>
-        </p:nvPicPr>
-        <p:blipFill>
-          <a:blip r:embed="rId3">
-            <a:extLst>
-              <a:ext uri="{28A0092B-C50C-407E-A947-70E740481C1C}">
-                <a14:useLocalDpi xmlns:a14="http://schemas.microsoft.com/office/drawing/2010/main" val="0"/>
-              </a:ext>
-            </a:extLst>
-          </a:blip>
-          <a:stretch>
-            <a:fillRect/>
-          </a:stretch>
-        </p:blipFill>
-        <p:spPr>
-          <a:xfrm>
-            <a:off x="1828174" y="4038601"/>
-            <a:ext cx="4496427" cy="1524213"/>
-          </a:xfrm>
-          <a:prstGeom prst="rect">
-            <a:avLst/>
-          </a:prstGeom>
-        </p:spPr>
-      </p:pic>
-      <p:pic>
-        <p:nvPicPr>
-          <p:cNvPr id="7" name="Picture 6"/>
-          <p:cNvPicPr>
-            <a:picLocks noChangeAspect="1"/>
-          </p:cNvPicPr>
-          <p:nvPr/>
-        </p:nvPicPr>
-        <p:blipFill>
-          <a:blip r:embed="rId4">
-            <a:extLst>
-              <a:ext uri="{28A0092B-C50C-407E-A947-70E740481C1C}">
-                <a14:useLocalDpi xmlns:a14="http://schemas.microsoft.com/office/drawing/2010/main" val="0"/>
-              </a:ext>
-            </a:extLst>
-          </a:blip>
-          <a:stretch>
-            <a:fillRect/>
-          </a:stretch>
-        </p:blipFill>
-        <p:spPr>
-          <a:xfrm>
-            <a:off x="1828174" y="4038814"/>
-            <a:ext cx="4496427" cy="1524213"/>
-          </a:xfrm>
-          <a:prstGeom prst="rect">
-            <a:avLst/>
-          </a:prstGeom>
-        </p:spPr>
-      </p:pic>
-      <p:pic>
-        <p:nvPicPr>
-          <p:cNvPr id="8" name="Picture 7"/>
-          <p:cNvPicPr>
-            <a:picLocks noChangeAspect="1"/>
-          </p:cNvPicPr>
-          <p:nvPr/>
-        </p:nvPicPr>
-        <p:blipFill>
-          <a:blip r:embed="rId5">
-            <a:extLst>
-              <a:ext uri="{28A0092B-C50C-407E-A947-70E740481C1C}">
-                <a14:useLocalDpi xmlns:a14="http://schemas.microsoft.com/office/drawing/2010/main" val="0"/>
-              </a:ext>
-            </a:extLst>
-          </a:blip>
-          <a:stretch>
-            <a:fillRect/>
-          </a:stretch>
-        </p:blipFill>
-        <p:spPr>
-          <a:xfrm>
-            <a:off x="1828174" y="4038814"/>
-            <a:ext cx="4496427" cy="1524213"/>
-          </a:xfrm>
-          <a:prstGeom prst="rect">
-            <a:avLst/>
-          </a:prstGeom>
-        </p:spPr>
-      </p:pic>
-    </p:spTree>
-    <p:extLst>
-      <p:ext uri="{BB962C8B-B14F-4D97-AF65-F5344CB8AC3E}">
-        <p14:creationId xmlns:p14="http://schemas.microsoft.com/office/powerpoint/2010/main" val="2788945599"/>
-      </p:ext>
-    </p:extLst>
-  </p:cSld>
-  <p:clrMapOvr>
-    <a:masterClrMapping/>
-  </p:clrMapOvr>
-  <p:timing>
-    <p:tnLst>
-      <p:par>
-        <p:cTn id="1" dur="indefinite" restart="never" nodeType="tmRoot">
-          <p:childTnLst>
-            <p:seq concurrent="1" nextAc="seek">
-              <p:cTn id="2" dur="indefinite" nodeType="mainSeq">
-                <p:childTnLst>
-                  <p:par>
-                    <p:cTn id="3" fill="hold">
-                      <p:stCondLst>
-                        <p:cond delay="indefinite"/>
-                      </p:stCondLst>
-                      <p:childTnLst>
-                        <p:par>
-                          <p:cTn id="4" fill="hold">
-                            <p:stCondLst>
-                              <p:cond delay="0"/>
-                            </p:stCondLst>
-                            <p:childTnLst>
-                              <p:par>
-                                <p:cTn id="5" presetID="1" presetClass="entr" presetSubtype="0" fill="hold" nodeType="clickEffect">
-                                  <p:stCondLst>
-                                    <p:cond delay="0"/>
-                                  </p:stCondLst>
-                                  <p:childTnLst>
-                                    <p:set>
-                                      <p:cBhvr>
-                                        <p:cTn id="6" dur="1" fill="hold">
-                                          <p:stCondLst>
-                                            <p:cond delay="0"/>
-                                          </p:stCondLst>
-                                        </p:cTn>
-                                        <p:tgtEl>
-                                          <p:spTgt spid="6"/>
-                                        </p:tgtEl>
-                                        <p:attrNameLst>
-                                          <p:attrName>style.visibility</p:attrName>
-                                        </p:attrNameLst>
-                                      </p:cBhvr>
-                                      <p:to>
-                                        <p:strVal val="visible"/>
-                                      </p:to>
-                                    </p:set>
-                                  </p:childTnLst>
-                                </p:cTn>
-                              </p:par>
-                            </p:childTnLst>
-                          </p:cTn>
-                        </p:par>
-                      </p:childTnLst>
-                    </p:cTn>
-                  </p:par>
-                  <p:par>
-                    <p:cTn id="7" fill="hold">
-                      <p:stCondLst>
-                        <p:cond delay="indefinite"/>
-                      </p:stCondLst>
-                      <p:childTnLst>
-                        <p:par>
-                          <p:cTn id="8" fill="hold">
-                            <p:stCondLst>
-                              <p:cond delay="0"/>
-                            </p:stCondLst>
-                            <p:childTnLst>
-                              <p:par>
-                                <p:cTn id="9" presetID="1" presetClass="entr" presetSubtype="0" fill="hold" nodeType="clickEffect">
-                                  <p:stCondLst>
-                                    <p:cond delay="0"/>
-                                  </p:stCondLst>
-                                  <p:childTnLst>
-                                    <p:set>
-                                      <p:cBhvr>
-                                        <p:cTn id="10" dur="1" fill="hold">
-                                          <p:stCondLst>
-                                            <p:cond delay="0"/>
-                                          </p:stCondLst>
-                                        </p:cTn>
-                                        <p:tgtEl>
-                                          <p:spTgt spid="7"/>
-                                        </p:tgtEl>
-                                        <p:attrNameLst>
-                                          <p:attrName>style.visibility</p:attrName>
-                                        </p:attrNameLst>
-                                      </p:cBhvr>
-                                      <p:to>
-                                        <p:strVal val="visible"/>
-                                      </p:to>
-                                    </p:set>
-                                  </p:childTnLst>
-                                </p:cTn>
-                              </p:par>
-                            </p:childTnLst>
-                          </p:cTn>
-                        </p:par>
-                      </p:childTnLst>
-                    </p:cTn>
-                  </p:par>
-                  <p:par>
-                    <p:cTn id="11" fill="hold">
-                      <p:stCondLst>
-                        <p:cond delay="indefinite"/>
-                      </p:stCondLst>
-                      <p:childTnLst>
-                        <p:par>
-                          <p:cTn id="12" fill="hold">
-                            <p:stCondLst>
-                              <p:cond delay="0"/>
-                            </p:stCondLst>
-                            <p:childTnLst>
-                              <p:par>
-                                <p:cTn id="13" presetID="1" presetClass="entr" presetSubtype="0" fill="hold" nodeType="clickEffect">
-                                  <p:stCondLst>
-                                    <p:cond delay="0"/>
-                                  </p:stCondLst>
-                                  <p:childTnLst>
-                                    <p:set>
-                                      <p:cBhvr>
-                                        <p:cTn id="14" dur="1" fill="hold">
-                                          <p:stCondLst>
-                                            <p:cond delay="0"/>
-                                          </p:stCondLst>
-                                        </p:cTn>
-                                        <p:tgtEl>
-                                          <p:spTgt spid="8"/>
-                                        </p:tgtEl>
-                                        <p:attrNameLst>
-                                          <p:attrName>style.visibility</p:attrName>
-                                        </p:attrNameLst>
-                                      </p:cBhvr>
-                                      <p:to>
-                                        <p:strVal val="visible"/>
-                                      </p:to>
-                                    </p:set>
-                                  </p:childTnLst>
-                                </p:cTn>
-                              </p:par>
-                            </p:childTnLst>
-                          </p:cTn>
-                        </p:par>
-                      </p:childTnLst>
-                    </p:cTn>
-                  </p:par>
-                </p:childTnLst>
-              </p:cTn>
-              <p:prevCondLst>
-                <p:cond evt="onPrev" delay="0">
-                  <p:tgtEl>
-                    <p:sldTgt/>
-                  </p:tgtEl>
-                </p:cond>
-              </p:prevCondLst>
-              <p:nextCondLst>
-                <p:cond evt="onNext" delay="0">
-                  <p:tgtEl>
-                    <p:sldTgt/>
-                  </p:tgtEl>
-                </p:cond>
-              </p:nextCondLst>
-            </p:seq>
-          </p:childTnLst>
-        </p:cTn>
-      </p:par>
-    </p:tnLst>
-  </p:timing>
 </p:sld>
 </file>
 
@@ -20130,6 +20509,600 @@
       </p:sp>
       <p:pic>
         <p:nvPicPr>
+          <p:cNvPr id="4" name="Picture 3"/>
+          <p:cNvPicPr>
+            <a:picLocks noChangeAspect="1"/>
+          </p:cNvPicPr>
+          <p:nvPr/>
+        </p:nvPicPr>
+        <p:blipFill>
+          <a:blip r:embed="rId2">
+            <a:extLst>
+              <a:ext uri="{28A0092B-C50C-407E-A947-70E740481C1C}">
+                <a14:useLocalDpi xmlns:a14="http://schemas.microsoft.com/office/drawing/2010/main" val="0"/>
+              </a:ext>
+            </a:extLst>
+          </a:blip>
+          <a:stretch>
+            <a:fillRect/>
+          </a:stretch>
+        </p:blipFill>
+        <p:spPr>
+          <a:xfrm>
+            <a:off x="1828801" y="3962401"/>
+            <a:ext cx="4496427" cy="1524213"/>
+          </a:xfrm>
+          <a:prstGeom prst="rect">
+            <a:avLst/>
+          </a:prstGeom>
+        </p:spPr>
+      </p:pic>
+    </p:spTree>
+    <p:extLst>
+      <p:ext uri="{BB962C8B-B14F-4D97-AF65-F5344CB8AC3E}">
+        <p14:creationId xmlns:p14="http://schemas.microsoft.com/office/powerpoint/2010/main" val="674210729"/>
+      </p:ext>
+    </p:extLst>
+  </p:cSld>
+  <p:clrMapOvr>
+    <a:masterClrMapping/>
+  </p:clrMapOvr>
+</p:sld>
+</file>
+
+<file path=ppt/slides/slide41.xml><?xml version="1.0" encoding="utf-8"?>
+<p:sld xmlns:a="http://schemas.openxmlformats.org/drawingml/2006/main" xmlns:r="http://schemas.openxmlformats.org/officeDocument/2006/relationships" xmlns:p="http://schemas.openxmlformats.org/presentationml/2006/main">
+  <p:cSld>
+    <p:spTree>
+      <p:nvGrpSpPr>
+        <p:cNvPr id="1" name=""/>
+        <p:cNvGrpSpPr/>
+        <p:nvPr/>
+      </p:nvGrpSpPr>
+      <p:grpSpPr>
+        <a:xfrm>
+          <a:off x="0" y="0"/>
+          <a:ext cx="0" cy="0"/>
+          <a:chOff x="0" y="0"/>
+          <a:chExt cx="0" cy="0"/>
+        </a:xfrm>
+      </p:grpSpPr>
+      <p:sp>
+        <p:nvSpPr>
+          <p:cNvPr id="2" name="Title 1"/>
+          <p:cNvSpPr>
+            <a:spLocks noGrp="1"/>
+          </p:cNvSpPr>
+          <p:nvPr>
+            <p:ph type="title"/>
+          </p:nvPr>
+        </p:nvSpPr>
+        <p:spPr/>
+        <p:txBody>
+          <a:bodyPr/>
+          <a:lstStyle/>
+          <a:p>
+            <a:r>
+              <a:rPr lang="en-US" dirty="0"/>
+              <a:t>Single Linkage Clustering</a:t>
+            </a:r>
+          </a:p>
+        </p:txBody>
+      </p:sp>
+      <p:sp>
+        <p:nvSpPr>
+          <p:cNvPr id="3" name="Content Placeholder 2"/>
+          <p:cNvSpPr>
+            <a:spLocks noGrp="1"/>
+          </p:cNvSpPr>
+          <p:nvPr>
+            <p:ph sz="quarter" idx="1"/>
+          </p:nvPr>
+        </p:nvSpPr>
+        <p:spPr/>
+        <p:txBody>
+          <a:bodyPr/>
+          <a:lstStyle/>
+          <a:p>
+            <a:r>
+              <a:rPr lang="en-US" dirty="0"/>
+              <a:t>Starting with each data point as a single cluster</a:t>
+            </a:r>
+          </a:p>
+          <a:p>
+            <a:r>
+              <a:rPr lang="en-US" dirty="0"/>
+              <a:t>Keep merging clusters based on nearest distance between points from their members</a:t>
+            </a:r>
+          </a:p>
+          <a:p>
+            <a:endParaRPr lang="en-US" dirty="0"/>
+          </a:p>
+        </p:txBody>
+      </p:sp>
+      <p:pic>
+        <p:nvPicPr>
+          <p:cNvPr id="5" name="Picture 4"/>
+          <p:cNvPicPr>
+            <a:picLocks noChangeAspect="1"/>
+          </p:cNvPicPr>
+          <p:nvPr/>
+        </p:nvPicPr>
+        <p:blipFill>
+          <a:blip r:embed="rId2">
+            <a:extLst>
+              <a:ext uri="{28A0092B-C50C-407E-A947-70E740481C1C}">
+                <a14:useLocalDpi xmlns:a14="http://schemas.microsoft.com/office/drawing/2010/main" val="0"/>
+              </a:ext>
+            </a:extLst>
+          </a:blip>
+          <a:stretch>
+            <a:fillRect/>
+          </a:stretch>
+        </p:blipFill>
+        <p:spPr>
+          <a:xfrm>
+            <a:off x="1839687" y="4038601"/>
+            <a:ext cx="4496427" cy="1524213"/>
+          </a:xfrm>
+          <a:prstGeom prst="rect">
+            <a:avLst/>
+          </a:prstGeom>
+        </p:spPr>
+      </p:pic>
+    </p:spTree>
+    <p:extLst>
+      <p:ext uri="{BB962C8B-B14F-4D97-AF65-F5344CB8AC3E}">
+        <p14:creationId xmlns:p14="http://schemas.microsoft.com/office/powerpoint/2010/main" val="830583734"/>
+      </p:ext>
+    </p:extLst>
+  </p:cSld>
+  <p:clrMapOvr>
+    <a:masterClrMapping/>
+  </p:clrMapOvr>
+</p:sld>
+</file>
+
+<file path=ppt/slides/slide42.xml><?xml version="1.0" encoding="utf-8"?>
+<p:sld xmlns:a="http://schemas.openxmlformats.org/drawingml/2006/main" xmlns:r="http://schemas.openxmlformats.org/officeDocument/2006/relationships" xmlns:p="http://schemas.openxmlformats.org/presentationml/2006/main">
+  <p:cSld>
+    <p:spTree>
+      <p:nvGrpSpPr>
+        <p:cNvPr id="1" name=""/>
+        <p:cNvGrpSpPr/>
+        <p:nvPr/>
+      </p:nvGrpSpPr>
+      <p:grpSpPr>
+        <a:xfrm>
+          <a:off x="0" y="0"/>
+          <a:ext cx="0" cy="0"/>
+          <a:chOff x="0" y="0"/>
+          <a:chExt cx="0" cy="0"/>
+        </a:xfrm>
+      </p:grpSpPr>
+      <p:sp>
+        <p:nvSpPr>
+          <p:cNvPr id="2" name="Title 1"/>
+          <p:cNvSpPr>
+            <a:spLocks noGrp="1"/>
+          </p:cNvSpPr>
+          <p:nvPr>
+            <p:ph type="title"/>
+          </p:nvPr>
+        </p:nvSpPr>
+        <p:spPr/>
+        <p:txBody>
+          <a:bodyPr/>
+          <a:lstStyle/>
+          <a:p>
+            <a:r>
+              <a:rPr lang="en-US" dirty="0"/>
+              <a:t>Single Linkage Clustering</a:t>
+            </a:r>
+          </a:p>
+        </p:txBody>
+      </p:sp>
+      <p:sp>
+        <p:nvSpPr>
+          <p:cNvPr id="3" name="Content Placeholder 2"/>
+          <p:cNvSpPr>
+            <a:spLocks noGrp="1"/>
+          </p:cNvSpPr>
+          <p:nvPr>
+            <p:ph sz="quarter" idx="1"/>
+          </p:nvPr>
+        </p:nvSpPr>
+        <p:spPr/>
+        <p:txBody>
+          <a:bodyPr/>
+          <a:lstStyle/>
+          <a:p>
+            <a:r>
+              <a:rPr lang="en-US" dirty="0"/>
+              <a:t>Starting with each data point as a single cluster</a:t>
+            </a:r>
+          </a:p>
+          <a:p>
+            <a:r>
+              <a:rPr lang="en-US" dirty="0"/>
+              <a:t>Keep merging clusters based on nearest distance between points from their members</a:t>
+            </a:r>
+          </a:p>
+          <a:p>
+            <a:endParaRPr lang="en-US" dirty="0"/>
+          </a:p>
+        </p:txBody>
+      </p:sp>
+      <p:pic>
+        <p:nvPicPr>
+          <p:cNvPr id="4" name="Picture 3"/>
+          <p:cNvPicPr>
+            <a:picLocks noChangeAspect="1"/>
+          </p:cNvPicPr>
+          <p:nvPr/>
+        </p:nvPicPr>
+        <p:blipFill>
+          <a:blip r:embed="rId2">
+            <a:extLst>
+              <a:ext uri="{28A0092B-C50C-407E-A947-70E740481C1C}">
+                <a14:useLocalDpi xmlns:a14="http://schemas.microsoft.com/office/drawing/2010/main" val="0"/>
+              </a:ext>
+            </a:extLst>
+          </a:blip>
+          <a:stretch>
+            <a:fillRect/>
+          </a:stretch>
+        </p:blipFill>
+        <p:spPr>
+          <a:xfrm>
+            <a:off x="1828801" y="4038814"/>
+            <a:ext cx="4496427" cy="1524213"/>
+          </a:xfrm>
+          <a:prstGeom prst="rect">
+            <a:avLst/>
+          </a:prstGeom>
+        </p:spPr>
+      </p:pic>
+      <p:pic>
+        <p:nvPicPr>
+          <p:cNvPr id="6" name="Picture 5"/>
+          <p:cNvPicPr>
+            <a:picLocks noChangeAspect="1"/>
+          </p:cNvPicPr>
+          <p:nvPr/>
+        </p:nvPicPr>
+        <p:blipFill>
+          <a:blip r:embed="rId3">
+            <a:extLst>
+              <a:ext uri="{28A0092B-C50C-407E-A947-70E740481C1C}">
+                <a14:useLocalDpi xmlns:a14="http://schemas.microsoft.com/office/drawing/2010/main" val="0"/>
+              </a:ext>
+            </a:extLst>
+          </a:blip>
+          <a:stretch>
+            <a:fillRect/>
+          </a:stretch>
+        </p:blipFill>
+        <p:spPr>
+          <a:xfrm>
+            <a:off x="1828174" y="4038601"/>
+            <a:ext cx="4496427" cy="1524213"/>
+          </a:xfrm>
+          <a:prstGeom prst="rect">
+            <a:avLst/>
+          </a:prstGeom>
+        </p:spPr>
+      </p:pic>
+      <p:pic>
+        <p:nvPicPr>
+          <p:cNvPr id="7" name="Picture 6"/>
+          <p:cNvPicPr>
+            <a:picLocks noChangeAspect="1"/>
+          </p:cNvPicPr>
+          <p:nvPr/>
+        </p:nvPicPr>
+        <p:blipFill>
+          <a:blip r:embed="rId4">
+            <a:extLst>
+              <a:ext uri="{28A0092B-C50C-407E-A947-70E740481C1C}">
+                <a14:useLocalDpi xmlns:a14="http://schemas.microsoft.com/office/drawing/2010/main" val="0"/>
+              </a:ext>
+            </a:extLst>
+          </a:blip>
+          <a:stretch>
+            <a:fillRect/>
+          </a:stretch>
+        </p:blipFill>
+        <p:spPr>
+          <a:xfrm>
+            <a:off x="1828174" y="4038814"/>
+            <a:ext cx="4496427" cy="1524213"/>
+          </a:xfrm>
+          <a:prstGeom prst="rect">
+            <a:avLst/>
+          </a:prstGeom>
+        </p:spPr>
+      </p:pic>
+      <p:pic>
+        <p:nvPicPr>
+          <p:cNvPr id="8" name="Picture 7"/>
+          <p:cNvPicPr>
+            <a:picLocks noChangeAspect="1"/>
+          </p:cNvPicPr>
+          <p:nvPr/>
+        </p:nvPicPr>
+        <p:blipFill>
+          <a:blip r:embed="rId5">
+            <a:extLst>
+              <a:ext uri="{28A0092B-C50C-407E-A947-70E740481C1C}">
+                <a14:useLocalDpi xmlns:a14="http://schemas.microsoft.com/office/drawing/2010/main" val="0"/>
+              </a:ext>
+            </a:extLst>
+          </a:blip>
+          <a:stretch>
+            <a:fillRect/>
+          </a:stretch>
+        </p:blipFill>
+        <p:spPr>
+          <a:xfrm>
+            <a:off x="1828174" y="4038814"/>
+            <a:ext cx="4496427" cy="1524213"/>
+          </a:xfrm>
+          <a:prstGeom prst="rect">
+            <a:avLst/>
+          </a:prstGeom>
+        </p:spPr>
+      </p:pic>
+    </p:spTree>
+    <p:extLst>
+      <p:ext uri="{BB962C8B-B14F-4D97-AF65-F5344CB8AC3E}">
+        <p14:creationId xmlns:p14="http://schemas.microsoft.com/office/powerpoint/2010/main" val="2788945599"/>
+      </p:ext>
+    </p:extLst>
+  </p:cSld>
+  <p:clrMapOvr>
+    <a:masterClrMapping/>
+  </p:clrMapOvr>
+  <p:timing>
+    <p:tnLst>
+      <p:par>
+        <p:cTn id="1" dur="indefinite" restart="never" nodeType="tmRoot">
+          <p:childTnLst>
+            <p:seq concurrent="1" nextAc="seek">
+              <p:cTn id="2" dur="indefinite" nodeType="mainSeq">
+                <p:childTnLst>
+                  <p:par>
+                    <p:cTn id="3" fill="hold">
+                      <p:stCondLst>
+                        <p:cond delay="indefinite"/>
+                      </p:stCondLst>
+                      <p:childTnLst>
+                        <p:par>
+                          <p:cTn id="4" fill="hold">
+                            <p:stCondLst>
+                              <p:cond delay="0"/>
+                            </p:stCondLst>
+                            <p:childTnLst>
+                              <p:par>
+                                <p:cTn id="5" presetID="1" presetClass="entr" presetSubtype="0" fill="hold" nodeType="clickEffect">
+                                  <p:stCondLst>
+                                    <p:cond delay="0"/>
+                                  </p:stCondLst>
+                                  <p:childTnLst>
+                                    <p:set>
+                                      <p:cBhvr>
+                                        <p:cTn id="6" dur="1" fill="hold">
+                                          <p:stCondLst>
+                                            <p:cond delay="0"/>
+                                          </p:stCondLst>
+                                        </p:cTn>
+                                        <p:tgtEl>
+                                          <p:spTgt spid="6"/>
+                                        </p:tgtEl>
+                                        <p:attrNameLst>
+                                          <p:attrName>style.visibility</p:attrName>
+                                        </p:attrNameLst>
+                                      </p:cBhvr>
+                                      <p:to>
+                                        <p:strVal val="visible"/>
+                                      </p:to>
+                                    </p:set>
+                                  </p:childTnLst>
+                                </p:cTn>
+                              </p:par>
+                            </p:childTnLst>
+                          </p:cTn>
+                        </p:par>
+                      </p:childTnLst>
+                    </p:cTn>
+                  </p:par>
+                  <p:par>
+                    <p:cTn id="7" fill="hold">
+                      <p:stCondLst>
+                        <p:cond delay="indefinite"/>
+                      </p:stCondLst>
+                      <p:childTnLst>
+                        <p:par>
+                          <p:cTn id="8" fill="hold">
+                            <p:stCondLst>
+                              <p:cond delay="0"/>
+                            </p:stCondLst>
+                            <p:childTnLst>
+                              <p:par>
+                                <p:cTn id="9" presetID="1" presetClass="entr" presetSubtype="0" fill="hold" nodeType="clickEffect">
+                                  <p:stCondLst>
+                                    <p:cond delay="0"/>
+                                  </p:stCondLst>
+                                  <p:childTnLst>
+                                    <p:set>
+                                      <p:cBhvr>
+                                        <p:cTn id="10" dur="1" fill="hold">
+                                          <p:stCondLst>
+                                            <p:cond delay="0"/>
+                                          </p:stCondLst>
+                                        </p:cTn>
+                                        <p:tgtEl>
+                                          <p:spTgt spid="7"/>
+                                        </p:tgtEl>
+                                        <p:attrNameLst>
+                                          <p:attrName>style.visibility</p:attrName>
+                                        </p:attrNameLst>
+                                      </p:cBhvr>
+                                      <p:to>
+                                        <p:strVal val="visible"/>
+                                      </p:to>
+                                    </p:set>
+                                  </p:childTnLst>
+                                </p:cTn>
+                              </p:par>
+                            </p:childTnLst>
+                          </p:cTn>
+                        </p:par>
+                      </p:childTnLst>
+                    </p:cTn>
+                  </p:par>
+                  <p:par>
+                    <p:cTn id="11" fill="hold">
+                      <p:stCondLst>
+                        <p:cond delay="indefinite"/>
+                      </p:stCondLst>
+                      <p:childTnLst>
+                        <p:par>
+                          <p:cTn id="12" fill="hold">
+                            <p:stCondLst>
+                              <p:cond delay="0"/>
+                            </p:stCondLst>
+                            <p:childTnLst>
+                              <p:par>
+                                <p:cTn id="13" presetID="1" presetClass="entr" presetSubtype="0" fill="hold" nodeType="clickEffect">
+                                  <p:stCondLst>
+                                    <p:cond delay="0"/>
+                                  </p:stCondLst>
+                                  <p:childTnLst>
+                                    <p:set>
+                                      <p:cBhvr>
+                                        <p:cTn id="14" dur="1" fill="hold">
+                                          <p:stCondLst>
+                                            <p:cond delay="0"/>
+                                          </p:stCondLst>
+                                        </p:cTn>
+                                        <p:tgtEl>
+                                          <p:spTgt spid="8"/>
+                                        </p:tgtEl>
+                                        <p:attrNameLst>
+                                          <p:attrName>style.visibility</p:attrName>
+                                        </p:attrNameLst>
+                                      </p:cBhvr>
+                                      <p:to>
+                                        <p:strVal val="visible"/>
+                                      </p:to>
+                                    </p:set>
+                                  </p:childTnLst>
+                                </p:cTn>
+                              </p:par>
+                            </p:childTnLst>
+                          </p:cTn>
+                        </p:par>
+                      </p:childTnLst>
+                    </p:cTn>
+                  </p:par>
+                </p:childTnLst>
+              </p:cTn>
+              <p:prevCondLst>
+                <p:cond evt="onPrev" delay="0">
+                  <p:tgtEl>
+                    <p:sldTgt/>
+                  </p:tgtEl>
+                </p:cond>
+              </p:prevCondLst>
+              <p:nextCondLst>
+                <p:cond evt="onNext" delay="0">
+                  <p:tgtEl>
+                    <p:sldTgt/>
+                  </p:tgtEl>
+                </p:cond>
+              </p:nextCondLst>
+            </p:seq>
+          </p:childTnLst>
+        </p:cTn>
+      </p:par>
+    </p:tnLst>
+  </p:timing>
+</p:sld>
+</file>
+
+<file path=ppt/slides/slide43.xml><?xml version="1.0" encoding="utf-8"?>
+<p:sld xmlns:a="http://schemas.openxmlformats.org/drawingml/2006/main" xmlns:r="http://schemas.openxmlformats.org/officeDocument/2006/relationships" xmlns:p="http://schemas.openxmlformats.org/presentationml/2006/main">
+  <p:cSld>
+    <p:spTree>
+      <p:nvGrpSpPr>
+        <p:cNvPr id="1" name=""/>
+        <p:cNvGrpSpPr/>
+        <p:nvPr/>
+      </p:nvGrpSpPr>
+      <p:grpSpPr>
+        <a:xfrm>
+          <a:off x="0" y="0"/>
+          <a:ext cx="0" cy="0"/>
+          <a:chOff x="0" y="0"/>
+          <a:chExt cx="0" cy="0"/>
+        </a:xfrm>
+      </p:grpSpPr>
+      <p:sp>
+        <p:nvSpPr>
+          <p:cNvPr id="2" name="Title 1"/>
+          <p:cNvSpPr>
+            <a:spLocks noGrp="1"/>
+          </p:cNvSpPr>
+          <p:nvPr>
+            <p:ph type="title"/>
+          </p:nvPr>
+        </p:nvSpPr>
+        <p:spPr/>
+        <p:txBody>
+          <a:bodyPr/>
+          <a:lstStyle/>
+          <a:p>
+            <a:r>
+              <a:rPr lang="en-US" dirty="0"/>
+              <a:t>Single Linkage Clustering</a:t>
+            </a:r>
+          </a:p>
+        </p:txBody>
+      </p:sp>
+      <p:sp>
+        <p:nvSpPr>
+          <p:cNvPr id="3" name="Content Placeholder 2"/>
+          <p:cNvSpPr>
+            <a:spLocks noGrp="1"/>
+          </p:cNvSpPr>
+          <p:nvPr>
+            <p:ph sz="quarter" idx="1"/>
+          </p:nvPr>
+        </p:nvSpPr>
+        <p:spPr/>
+        <p:txBody>
+          <a:bodyPr/>
+          <a:lstStyle/>
+          <a:p>
+            <a:r>
+              <a:rPr lang="en-US" dirty="0"/>
+              <a:t>Starting with each data point as a single cluster</a:t>
+            </a:r>
+          </a:p>
+          <a:p>
+            <a:r>
+              <a:rPr lang="en-US" dirty="0"/>
+              <a:t>Keep merging clusters based on nearest distance between points from their members</a:t>
+            </a:r>
+          </a:p>
+          <a:p>
+            <a:endParaRPr lang="en-US" dirty="0"/>
+          </a:p>
+        </p:txBody>
+      </p:sp>
+      <p:pic>
+        <p:nvPicPr>
           <p:cNvPr id="6" name="Picture 5"/>
           <p:cNvPicPr>
             <a:picLocks noChangeAspect="1"/>
@@ -20235,7 +21208,7 @@
 </p:sld>
 </file>
 
-<file path=ppt/slides/slide41.xml><?xml version="1.0" encoding="utf-8"?>
+<file path=ppt/slides/slide44.xml><?xml version="1.0" encoding="utf-8"?>
 <p:sld xmlns:a="http://schemas.openxmlformats.org/drawingml/2006/main" xmlns:r="http://schemas.openxmlformats.org/officeDocument/2006/relationships" xmlns:p="http://schemas.openxmlformats.org/presentationml/2006/main">
   <p:cSld>
     <p:spTree>
@@ -21017,7 +21990,7 @@
 </p:sld>
 </file>
 
-<file path=ppt/slides/slide42.xml><?xml version="1.0" encoding="utf-8"?>
+<file path=ppt/slides/slide45.xml><?xml version="1.0" encoding="utf-8"?>
 <p:sld xmlns:a="http://schemas.openxmlformats.org/drawingml/2006/main" xmlns:r="http://schemas.openxmlformats.org/officeDocument/2006/relationships" xmlns:p="http://schemas.openxmlformats.org/presentationml/2006/main">
   <p:cSld>
     <p:spTree>
@@ -21332,7 +22305,7 @@
 </p:sld>
 </file>
 
-<file path=ppt/slides/slide43.xml><?xml version="1.0" encoding="utf-8"?>
+<file path=ppt/slides/slide46.xml><?xml version="1.0" encoding="utf-8"?>
 <p:sld xmlns:a="http://schemas.openxmlformats.org/drawingml/2006/main" xmlns:r="http://schemas.openxmlformats.org/officeDocument/2006/relationships" xmlns:p="http://schemas.openxmlformats.org/presentationml/2006/main">
   <p:cSld>
     <p:spTree>
@@ -21928,14 +22901,327 @@
           </a:p>
         </p:txBody>
       </p:sp>
-      <mc:AlternateContent xmlns:mc="http://schemas.openxmlformats.org/markup-compatibility/2006" xmlns:a14="http://schemas.microsoft.com/office/drawing/2010/main">
-        <mc:Choice Requires="a14">
+      <mc:AlternateContent xmlns:mc="http://schemas.openxmlformats.org/markup-compatibility/2006">
+        <mc:Choice xmlns:a14="http://schemas.microsoft.com/office/drawing/2010/main" Requires="a14">
           <p:sp>
             <p:nvSpPr>
               <p:cNvPr id="3" name="Content Placeholder 2">
                 <a:extLst>
                   <a:ext uri="{FF2B5EF4-FFF2-40B4-BE49-F238E27FC236}">
                     <a16:creationId xmlns:a16="http://schemas.microsoft.com/office/drawing/2014/main" id="{DF020A78-6072-4934-B1BA-9CFEAA6C7E52}"/>
+                  </a:ext>
+                </a:extLst>
+              </p:cNvPr>
+              <p:cNvSpPr>
+                <a:spLocks noGrp="1"/>
+              </p:cNvSpPr>
+              <p:nvPr>
+                <p:ph sz="quarter" idx="1"/>
+              </p:nvPr>
+            </p:nvSpPr>
+            <p:spPr/>
+            <p:txBody>
+              <a:bodyPr/>
+              <a:lstStyle/>
+              <a:p>
+                <a:r>
+                  <a:rPr lang="en-US" sz="2400" dirty="0"/>
+                  <a:t>We will add edges gradually in a greedy manner using smallest weights, while maintaining what we have so far does not have any cycle</a:t>
+                </a:r>
+              </a:p>
+              <a:p>
+                <a:pPr lvl="1"/>
+                <a:r>
+                  <a:rPr lang="en-US" sz="2000" dirty="0"/>
+                  <a:t>add edges to tree in ascending order by weight</a:t>
+                </a:r>
+              </a:p>
+              <a:p>
+                <a:pPr lvl="1"/>
+                <a:r>
+                  <a:rPr lang="en-US" sz="2000" dirty="0"/>
+                  <a:t>but if an edge creates a </a:t>
+                </a:r>
+                <a:r>
+                  <a:rPr lang="en-US" sz="2000" dirty="0">
+                    <a:solidFill>
+                      <a:srgbClr val="700000"/>
+                    </a:solidFill>
+                  </a:rPr>
+                  <a:t>cycle</a:t>
+                </a:r>
+                <a:r>
+                  <a:rPr lang="en-US" sz="2000" dirty="0"/>
+                  <a:t>, do not add it, and move on to next edge</a:t>
+                </a:r>
+              </a:p>
+              <a:p>
+                <a:pPr lvl="1"/>
+                <a:endParaRPr lang="en-US" sz="2000" dirty="0"/>
+              </a:p>
+              <a:p>
+                <a:r>
+                  <a:rPr lang="en-US" sz="2400" dirty="0"/>
+                  <a:t>How do we check whether adding a new edge </a:t>
+                </a:r>
+                <a14:m>
+                  <m:oMath xmlns:m="http://schemas.openxmlformats.org/officeDocument/2006/math">
+                    <m:r>
+                      <a:rPr lang="en-US" sz="2400" i="1">
+                        <a:latin typeface="Cambria Math" panose="02040503050406030204" pitchFamily="18" charset="0"/>
+                      </a:rPr>
+                      <m:t>𝑒</m:t>
+                    </m:r>
+                    <m:r>
+                      <a:rPr lang="en-US" sz="2400" i="1">
+                        <a:latin typeface="Cambria Math" panose="02040503050406030204" pitchFamily="18" charset="0"/>
+                      </a:rPr>
+                      <m:t>=(</m:t>
+                    </m:r>
+                    <m:r>
+                      <a:rPr lang="en-US" sz="2400" i="1">
+                        <a:latin typeface="Cambria Math" panose="02040503050406030204" pitchFamily="18" charset="0"/>
+                      </a:rPr>
+                      <m:t>𝑢</m:t>
+                    </m:r>
+                    <m:r>
+                      <a:rPr lang="en-US" sz="2400" i="1">
+                        <a:latin typeface="Cambria Math" panose="02040503050406030204" pitchFamily="18" charset="0"/>
+                      </a:rPr>
+                      <m:t>,</m:t>
+                    </m:r>
+                    <m:r>
+                      <a:rPr lang="en-US" sz="2400" i="1">
+                        <a:latin typeface="Cambria Math" panose="02040503050406030204" pitchFamily="18" charset="0"/>
+                      </a:rPr>
+                      <m:t>𝑣</m:t>
+                    </m:r>
+                    <m:r>
+                      <a:rPr lang="en-US" sz="2400" i="1">
+                        <a:latin typeface="Cambria Math" panose="02040503050406030204" pitchFamily="18" charset="0"/>
+                      </a:rPr>
+                      <m:t>)</m:t>
+                    </m:r>
+                  </m:oMath>
+                </a14:m>
+                <a:r>
+                  <a:rPr lang="en-US" sz="2400" dirty="0"/>
+                  <a:t> creates a </a:t>
+                </a:r>
+                <a:r>
+                  <a:rPr lang="en-US" sz="2400" dirty="0">
+                    <a:solidFill>
+                      <a:srgbClr val="700000"/>
+                    </a:solidFill>
+                  </a:rPr>
+                  <a:t>cycle</a:t>
+                </a:r>
+                <a:r>
+                  <a:rPr lang="en-US" sz="2400" dirty="0"/>
+                  <a:t> or not? </a:t>
+                </a:r>
+              </a:p>
+              <a:p>
+                <a:pPr lvl="1"/>
+                <a:endParaRPr lang="en-US" dirty="0"/>
+              </a:p>
+            </p:txBody>
+          </p:sp>
+        </mc:Choice>
+        <mc:Fallback>
+          <p:sp>
+            <p:nvSpPr>
+              <p:cNvPr id="3" name="Content Placeholder 2">
+                <a:extLst>
+                  <a:ext uri="{FF2B5EF4-FFF2-40B4-BE49-F238E27FC236}">
+                    <a16:creationId xmlns:a16="http://schemas.microsoft.com/office/drawing/2014/main" id="{DF020A78-6072-4934-B1BA-9CFEAA6C7E52}"/>
+                  </a:ext>
+                </a:extLst>
+              </p:cNvPr>
+              <p:cNvSpPr>
+                <a:spLocks noGrp="1" noRot="1" noChangeAspect="1" noMove="1" noResize="1" noEditPoints="1" noAdjustHandles="1" noChangeArrowheads="1" noChangeShapeType="1" noTextEdit="1"/>
+              </p:cNvSpPr>
+              <p:nvPr>
+                <p:ph sz="quarter" idx="1"/>
+              </p:nvPr>
+            </p:nvSpPr>
+            <p:spPr>
+              <a:blipFill>
+                <a:blip r:embed="rId2"/>
+                <a:stretch>
+                  <a:fillRect l="-389" t="-988"/>
+                </a:stretch>
+              </a:blipFill>
+            </p:spPr>
+            <p:txBody>
+              <a:bodyPr/>
+              <a:lstStyle/>
+              <a:p>
+                <a:r>
+                  <a:rPr lang="en-US">
+                    <a:noFill/>
+                  </a:rPr>
+                  <a:t> </a:t>
+                </a:r>
+              </a:p>
+            </p:txBody>
+          </p:sp>
+        </mc:Fallback>
+      </mc:AlternateContent>
+    </p:spTree>
+    <p:extLst>
+      <p:ext uri="{BB962C8B-B14F-4D97-AF65-F5344CB8AC3E}">
+        <p14:creationId xmlns:p14="http://schemas.microsoft.com/office/powerpoint/2010/main" val="1480356602"/>
+      </p:ext>
+    </p:extLst>
+  </p:cSld>
+  <p:clrMapOvr>
+    <a:masterClrMapping/>
+  </p:clrMapOvr>
+  <p:timing>
+    <p:tnLst>
+      <p:par>
+        <p:cTn id="1" dur="indefinite" restart="never" nodeType="tmRoot">
+          <p:childTnLst>
+            <p:seq concurrent="1" nextAc="seek">
+              <p:cTn id="2" dur="indefinite" nodeType="mainSeq">
+                <p:childTnLst>
+                  <p:par>
+                    <p:cTn id="3" fill="hold">
+                      <p:stCondLst>
+                        <p:cond delay="indefinite"/>
+                      </p:stCondLst>
+                      <p:childTnLst>
+                        <p:par>
+                          <p:cTn id="4" fill="hold">
+                            <p:stCondLst>
+                              <p:cond delay="0"/>
+                            </p:stCondLst>
+                            <p:childTnLst>
+                              <p:par>
+                                <p:cTn id="5" presetID="1" presetClass="entr" presetSubtype="0" fill="hold" grpId="0" nodeType="clickEffect">
+                                  <p:stCondLst>
+                                    <p:cond delay="0"/>
+                                  </p:stCondLst>
+                                  <p:childTnLst>
+                                    <p:set>
+                                      <p:cBhvr>
+                                        <p:cTn id="6" dur="1" fill="hold">
+                                          <p:stCondLst>
+                                            <p:cond delay="0"/>
+                                          </p:stCondLst>
+                                        </p:cTn>
+                                        <p:tgtEl>
+                                          <p:spTgt spid="3">
+                                            <p:txEl>
+                                              <p:pRg st="4" end="4"/>
+                                            </p:txEl>
+                                          </p:spTgt>
+                                        </p:tgtEl>
+                                        <p:attrNameLst>
+                                          <p:attrName>style.visibility</p:attrName>
+                                        </p:attrNameLst>
+                                      </p:cBhvr>
+                                      <p:to>
+                                        <p:strVal val="visible"/>
+                                      </p:to>
+                                    </p:set>
+                                  </p:childTnLst>
+                                </p:cTn>
+                              </p:par>
+                            </p:childTnLst>
+                          </p:cTn>
+                        </p:par>
+                      </p:childTnLst>
+                    </p:cTn>
+                  </p:par>
+                </p:childTnLst>
+              </p:cTn>
+              <p:prevCondLst>
+                <p:cond evt="onPrev" delay="0">
+                  <p:tgtEl>
+                    <p:sldTgt/>
+                  </p:tgtEl>
+                </p:cond>
+              </p:prevCondLst>
+              <p:nextCondLst>
+                <p:cond evt="onNext" delay="0">
+                  <p:tgtEl>
+                    <p:sldTgt/>
+                  </p:tgtEl>
+                </p:cond>
+              </p:nextCondLst>
+            </p:seq>
+          </p:childTnLst>
+        </p:cTn>
+      </p:par>
+    </p:tnLst>
+    <p:bldLst>
+      <p:bldP spid="3" grpId="0" build="p"/>
+    </p:bldLst>
+  </p:timing>
+</p:sld>
+</file>
+
+<file path=ppt/slides/slide8.xml><?xml version="1.0" encoding="utf-8"?>
+<p:sld xmlns:a="http://schemas.openxmlformats.org/drawingml/2006/main" xmlns:r="http://schemas.openxmlformats.org/officeDocument/2006/relationships" xmlns:p="http://schemas.openxmlformats.org/presentationml/2006/main">
+  <p:cSld>
+    <p:spTree>
+      <p:nvGrpSpPr>
+        <p:cNvPr id="1" name="">
+          <a:extLst>
+            <a:ext uri="{FF2B5EF4-FFF2-40B4-BE49-F238E27FC236}">
+              <a16:creationId xmlns:a16="http://schemas.microsoft.com/office/drawing/2014/main" id="{FA05CFBE-8841-E593-3CD5-ED0328318D47}"/>
+            </a:ext>
+          </a:extLst>
+        </p:cNvPr>
+        <p:cNvGrpSpPr/>
+        <p:nvPr/>
+      </p:nvGrpSpPr>
+      <p:grpSpPr>
+        <a:xfrm>
+          <a:off x="0" y="0"/>
+          <a:ext cx="0" cy="0"/>
+          <a:chOff x="0" y="0"/>
+          <a:chExt cx="0" cy="0"/>
+        </a:xfrm>
+      </p:grpSpPr>
+      <p:sp>
+        <p:nvSpPr>
+          <p:cNvPr id="2" name="Title 1">
+            <a:extLst>
+              <a:ext uri="{FF2B5EF4-FFF2-40B4-BE49-F238E27FC236}">
+                <a16:creationId xmlns:a16="http://schemas.microsoft.com/office/drawing/2014/main" id="{446F55F1-DD76-FAAE-831D-505182DA4165}"/>
+              </a:ext>
+            </a:extLst>
+          </p:cNvPr>
+          <p:cNvSpPr>
+            <a:spLocks noGrp="1"/>
+          </p:cNvSpPr>
+          <p:nvPr>
+            <p:ph type="title"/>
+          </p:nvPr>
+        </p:nvSpPr>
+        <p:spPr/>
+        <p:txBody>
+          <a:bodyPr/>
+          <a:lstStyle/>
+          <a:p>
+            <a:r>
+              <a:rPr lang="en-US" dirty="0"/>
+              <a:t>Strategy</a:t>
+            </a:r>
+          </a:p>
+        </p:txBody>
+      </p:sp>
+      <mc:AlternateContent xmlns:mc="http://schemas.openxmlformats.org/markup-compatibility/2006">
+        <mc:Choice xmlns:a14="http://schemas.microsoft.com/office/drawing/2010/main" Requires="a14">
+          <p:sp>
+            <p:nvSpPr>
+              <p:cNvPr id="3" name="Content Placeholder 2">
+                <a:extLst>
+                  <a:ext uri="{FF2B5EF4-FFF2-40B4-BE49-F238E27FC236}">
+                    <a16:creationId xmlns:a16="http://schemas.microsoft.com/office/drawing/2014/main" id="{0B14192C-60B4-F9A9-6A0A-47DE5CDBD28C}"/>
                   </a:ext>
                 </a:extLst>
               </p:cNvPr>
@@ -22088,13 +23374,13 @@
             </p:txBody>
           </p:sp>
         </mc:Choice>
-        <mc:Fallback xmlns="">
+        <mc:Fallback>
           <p:sp>
             <p:nvSpPr>
               <p:cNvPr id="3" name="Content Placeholder 2">
                 <a:extLst>
                   <a:ext uri="{FF2B5EF4-FFF2-40B4-BE49-F238E27FC236}">
-                    <a16:creationId xmlns:a16="http://schemas.microsoft.com/office/drawing/2014/main" id="{DF020A78-6072-4934-B1BA-9CFEAA6C7E52}"/>
+                    <a16:creationId xmlns:a16="http://schemas.microsoft.com/office/drawing/2014/main" id="{0B14192C-60B4-F9A9-6A0A-47DE5CDBD28C}"/>
                   </a:ext>
                 </a:extLst>
               </p:cNvPr>
@@ -22131,7 +23417,7 @@
     </p:spTree>
     <p:extLst>
       <p:ext uri="{BB962C8B-B14F-4D97-AF65-F5344CB8AC3E}">
-        <p14:creationId xmlns:p14="http://schemas.microsoft.com/office/powerpoint/2010/main" val="1480356602"/>
+        <p14:creationId xmlns:p14="http://schemas.microsoft.com/office/powerpoint/2010/main" val="3253393773"/>
       </p:ext>
     </p:extLst>
   </p:cSld>
@@ -22254,7 +23540,7 @@
 </p:sld>
 </file>
 
-<file path=ppt/slides/slide8.xml><?xml version="1.0" encoding="utf-8"?>
+<file path=ppt/slides/slide9.xml><?xml version="1.0" encoding="utf-8"?>
 <p:sld xmlns:a="http://schemas.openxmlformats.org/drawingml/2006/main" xmlns:r="http://schemas.openxmlformats.org/officeDocument/2006/relationships" xmlns:p="http://schemas.openxmlformats.org/presentationml/2006/main">
   <p:cSld>
     <p:spTree>
@@ -22369,565 +23655,6 @@
   <p:clrMapOvr>
     <a:masterClrMapping/>
   </p:clrMapOvr>
-</p:sld>
-</file>
-
-<file path=ppt/slides/slide9.xml><?xml version="1.0" encoding="utf-8"?>
-<p:sld xmlns:a="http://schemas.openxmlformats.org/drawingml/2006/main" xmlns:r="http://schemas.openxmlformats.org/officeDocument/2006/relationships" xmlns:p="http://schemas.openxmlformats.org/presentationml/2006/main">
-  <p:cSld>
-    <p:spTree>
-      <p:nvGrpSpPr>
-        <p:cNvPr id="1" name=""/>
-        <p:cNvGrpSpPr/>
-        <p:nvPr/>
-      </p:nvGrpSpPr>
-      <p:grpSpPr>
-        <a:xfrm>
-          <a:off x="0" y="0"/>
-          <a:ext cx="0" cy="0"/>
-          <a:chOff x="0" y="0"/>
-          <a:chExt cx="0" cy="0"/>
-        </a:xfrm>
-      </p:grpSpPr>
-      <p:sp>
-        <p:nvSpPr>
-          <p:cNvPr id="2" name="Title 1">
-            <a:extLst>
-              <a:ext uri="{FF2B5EF4-FFF2-40B4-BE49-F238E27FC236}">
-                <a16:creationId xmlns:a16="http://schemas.microsoft.com/office/drawing/2014/main" id="{BE97B0F8-F5C6-4AB5-9C29-1B5C39ABB6D4}"/>
-              </a:ext>
-            </a:extLst>
-          </p:cNvPr>
-          <p:cNvSpPr>
-            <a:spLocks noGrp="1"/>
-          </p:cNvSpPr>
-          <p:nvPr>
-            <p:ph type="title"/>
-          </p:nvPr>
-        </p:nvSpPr>
-        <p:spPr/>
-        <p:txBody>
-          <a:bodyPr/>
-          <a:lstStyle/>
-          <a:p>
-            <a:r>
-              <a:rPr lang="en-US" dirty="0"/>
-              <a:t>Example</a:t>
-            </a:r>
-          </a:p>
-        </p:txBody>
-      </p:sp>
-      <p:sp>
-        <p:nvSpPr>
-          <p:cNvPr id="3" name="Content Placeholder 2">
-            <a:extLst>
-              <a:ext uri="{FF2B5EF4-FFF2-40B4-BE49-F238E27FC236}">
-                <a16:creationId xmlns:a16="http://schemas.microsoft.com/office/drawing/2014/main" id="{DF020A78-6072-4934-B1BA-9CFEAA6C7E52}"/>
-              </a:ext>
-            </a:extLst>
-          </p:cNvPr>
-          <p:cNvSpPr>
-            <a:spLocks noGrp="1"/>
-          </p:cNvSpPr>
-          <p:nvPr>
-            <p:ph sz="quarter" idx="1"/>
-          </p:nvPr>
-        </p:nvSpPr>
-        <p:spPr/>
-        <p:txBody>
-          <a:bodyPr/>
-          <a:lstStyle/>
-          <a:p>
-            <a:endParaRPr lang="en-US" sz="2000" dirty="0"/>
-          </a:p>
-        </p:txBody>
-      </p:sp>
-      <p:pic>
-        <p:nvPicPr>
-          <p:cNvPr id="4" name="Picture 2">
-            <a:extLst>
-              <a:ext uri="{FF2B5EF4-FFF2-40B4-BE49-F238E27FC236}">
-                <a16:creationId xmlns:a16="http://schemas.microsoft.com/office/drawing/2014/main" id="{00D6EC57-0614-4864-9FE9-E79D6502480C}"/>
-              </a:ext>
-            </a:extLst>
-          </p:cNvPr>
-          <p:cNvPicPr>
-            <a:picLocks noChangeAspect="1" noChangeArrowheads="1"/>
-          </p:cNvPicPr>
-          <p:nvPr/>
-        </p:nvPicPr>
-        <p:blipFill>
-          <a:blip r:embed="rId2">
-            <a:extLst>
-              <a:ext uri="{28A0092B-C50C-407E-A947-70E740481C1C}">
-                <a14:useLocalDpi xmlns:a14="http://schemas.microsoft.com/office/drawing/2010/main" val="0"/>
-              </a:ext>
-            </a:extLst>
-          </a:blip>
-          <a:srcRect/>
-          <a:stretch>
-            <a:fillRect/>
-          </a:stretch>
-        </p:blipFill>
-        <p:spPr bwMode="auto">
-          <a:xfrm>
-            <a:off x="2874861" y="1225659"/>
-            <a:ext cx="6105525" cy="2965341"/>
-          </a:xfrm>
-          <a:prstGeom prst="rect">
-            <a:avLst/>
-          </a:prstGeom>
-          <a:noFill/>
-          <a:ln>
-            <a:noFill/>
-          </a:ln>
-          <a:extLst>
-            <a:ext uri="{909E8E84-426E-40DD-AFC4-6F175D3DCCD1}">
-              <a14:hiddenFill xmlns:a14="http://schemas.microsoft.com/office/drawing/2010/main">
-                <a:solidFill>
-                  <a:schemeClr val="accent1"/>
-                </a:solidFill>
-              </a14:hiddenFill>
-            </a:ext>
-            <a:ext uri="{91240B29-F687-4F45-9708-019B960494DF}">
-              <a14:hiddenLine xmlns:a14="http://schemas.microsoft.com/office/drawing/2010/main" w="9525">
-                <a:solidFill>
-                  <a:schemeClr val="tx1"/>
-                </a:solidFill>
-                <a:miter lim="800000"/>
-                <a:headEnd/>
-                <a:tailEnd/>
-              </a14:hiddenLine>
-            </a:ext>
-          </a:extLst>
-        </p:spPr>
-      </p:pic>
-      <p:grpSp>
-        <p:nvGrpSpPr>
-          <p:cNvPr id="5" name="Group 4">
-            <a:extLst>
-              <a:ext uri="{FF2B5EF4-FFF2-40B4-BE49-F238E27FC236}">
-                <a16:creationId xmlns:a16="http://schemas.microsoft.com/office/drawing/2014/main" id="{86E47D35-CF66-4076-AE05-D3F9C10244A8}"/>
-              </a:ext>
-            </a:extLst>
-          </p:cNvPr>
-          <p:cNvGrpSpPr/>
-          <p:nvPr/>
-        </p:nvGrpSpPr>
-        <p:grpSpPr>
-          <a:xfrm>
-            <a:off x="3260676" y="1691640"/>
-            <a:ext cx="5273724" cy="2133600"/>
-            <a:chOff x="990600" y="2057400"/>
-            <a:chExt cx="7086600" cy="2908300"/>
-          </a:xfrm>
-        </p:grpSpPr>
-        <p:cxnSp>
-          <p:nvCxnSpPr>
-            <p:cNvPr id="6" name="Straight Connector 5">
-              <a:extLst>
-                <a:ext uri="{FF2B5EF4-FFF2-40B4-BE49-F238E27FC236}">
-                  <a16:creationId xmlns:a16="http://schemas.microsoft.com/office/drawing/2014/main" id="{32F96EEC-8F8B-487D-BD48-A08B8A7A527B}"/>
-                </a:ext>
-              </a:extLst>
-            </p:cNvPr>
-            <p:cNvCxnSpPr/>
-            <p:nvPr/>
-          </p:nvCxnSpPr>
-          <p:spPr bwMode="auto">
-            <a:xfrm flipH="1" flipV="1">
-              <a:off x="990600" y="3708400"/>
-              <a:ext cx="838200" cy="1016000"/>
-            </a:xfrm>
-            <a:prstGeom prst="line">
-              <a:avLst/>
-            </a:prstGeom>
-            <a:ln w="47625">
-              <a:headEnd type="none" w="med" len="med"/>
-              <a:tailEnd type="none" w="med" len="med"/>
-            </a:ln>
-          </p:spPr>
-          <p:style>
-            <a:lnRef idx="1">
-              <a:schemeClr val="dk1"/>
-            </a:lnRef>
-            <a:fillRef idx="0">
-              <a:schemeClr val="dk1"/>
-            </a:fillRef>
-            <a:effectRef idx="0">
-              <a:schemeClr val="dk1"/>
-            </a:effectRef>
-            <a:fontRef idx="minor">
-              <a:schemeClr val="tx1"/>
-            </a:fontRef>
-          </p:style>
-        </p:cxnSp>
-        <p:cxnSp>
-          <p:nvCxnSpPr>
-            <p:cNvPr id="7" name="Straight Connector 6">
-              <a:extLst>
-                <a:ext uri="{FF2B5EF4-FFF2-40B4-BE49-F238E27FC236}">
-                  <a16:creationId xmlns:a16="http://schemas.microsoft.com/office/drawing/2014/main" id="{7491417B-AEF5-4225-929E-A782976B9F25}"/>
-                </a:ext>
-              </a:extLst>
-            </p:cNvPr>
-            <p:cNvCxnSpPr/>
-            <p:nvPr/>
-          </p:nvCxnSpPr>
-          <p:spPr bwMode="auto">
-            <a:xfrm flipH="1">
-              <a:off x="990600" y="2286000"/>
-              <a:ext cx="838200" cy="927100"/>
-            </a:xfrm>
-            <a:prstGeom prst="line">
-              <a:avLst/>
-            </a:prstGeom>
-            <a:ln w="47625">
-              <a:headEnd type="none" w="med" len="med"/>
-              <a:tailEnd type="none" w="med" len="med"/>
-            </a:ln>
-          </p:spPr>
-          <p:style>
-            <a:lnRef idx="1">
-              <a:schemeClr val="dk1"/>
-            </a:lnRef>
-            <a:fillRef idx="0">
-              <a:schemeClr val="dk1"/>
-            </a:fillRef>
-            <a:effectRef idx="0">
-              <a:schemeClr val="dk1"/>
-            </a:effectRef>
-            <a:fontRef idx="minor">
-              <a:schemeClr val="tx1"/>
-            </a:fontRef>
-          </p:style>
-        </p:cxnSp>
-        <p:cxnSp>
-          <p:nvCxnSpPr>
-            <p:cNvPr id="8" name="Straight Connector 7">
-              <a:extLst>
-                <a:ext uri="{FF2B5EF4-FFF2-40B4-BE49-F238E27FC236}">
-                  <a16:creationId xmlns:a16="http://schemas.microsoft.com/office/drawing/2014/main" id="{13F87734-66F6-4F92-8B1D-1D4440440893}"/>
-                </a:ext>
-              </a:extLst>
-            </p:cNvPr>
-            <p:cNvCxnSpPr/>
-            <p:nvPr/>
-          </p:nvCxnSpPr>
-          <p:spPr bwMode="auto">
-            <a:xfrm flipH="1">
-              <a:off x="2362200" y="4965700"/>
-              <a:ext cx="1905000" cy="0"/>
-            </a:xfrm>
-            <a:prstGeom prst="line">
-              <a:avLst/>
-            </a:prstGeom>
-            <a:ln w="47625">
-              <a:headEnd type="none" w="med" len="med"/>
-              <a:tailEnd type="none" w="med" len="med"/>
-            </a:ln>
-          </p:spPr>
-          <p:style>
-            <a:lnRef idx="1">
-              <a:schemeClr val="dk1"/>
-            </a:lnRef>
-            <a:fillRef idx="0">
-              <a:schemeClr val="dk1"/>
-            </a:fillRef>
-            <a:effectRef idx="0">
-              <a:schemeClr val="dk1"/>
-            </a:effectRef>
-            <a:fontRef idx="minor">
-              <a:schemeClr val="tx1"/>
-            </a:fontRef>
-          </p:style>
-        </p:cxnSp>
-        <p:cxnSp>
-          <p:nvCxnSpPr>
-            <p:cNvPr id="9" name="Straight Connector 8">
-              <a:extLst>
-                <a:ext uri="{FF2B5EF4-FFF2-40B4-BE49-F238E27FC236}">
-                  <a16:creationId xmlns:a16="http://schemas.microsoft.com/office/drawing/2014/main" id="{BCAE83D8-FC82-4922-B05E-4B82279D15DB}"/>
-                </a:ext>
-              </a:extLst>
-            </p:cNvPr>
-            <p:cNvCxnSpPr/>
-            <p:nvPr/>
-          </p:nvCxnSpPr>
-          <p:spPr bwMode="auto">
-            <a:xfrm flipH="1">
-              <a:off x="4876800" y="4965700"/>
-              <a:ext cx="1905000" cy="0"/>
-            </a:xfrm>
-            <a:prstGeom prst="line">
-              <a:avLst/>
-            </a:prstGeom>
-            <a:ln w="47625">
-              <a:headEnd type="none" w="med" len="med"/>
-              <a:tailEnd type="none" w="med" len="med"/>
-            </a:ln>
-          </p:spPr>
-          <p:style>
-            <a:lnRef idx="1">
-              <a:schemeClr val="dk1"/>
-            </a:lnRef>
-            <a:fillRef idx="0">
-              <a:schemeClr val="dk1"/>
-            </a:fillRef>
-            <a:effectRef idx="0">
-              <a:schemeClr val="dk1"/>
-            </a:effectRef>
-            <a:fontRef idx="minor">
-              <a:schemeClr val="tx1"/>
-            </a:fontRef>
-          </p:style>
-        </p:cxnSp>
-        <p:cxnSp>
-          <p:nvCxnSpPr>
-            <p:cNvPr id="10" name="Straight Connector 9">
-              <a:extLst>
-                <a:ext uri="{FF2B5EF4-FFF2-40B4-BE49-F238E27FC236}">
-                  <a16:creationId xmlns:a16="http://schemas.microsoft.com/office/drawing/2014/main" id="{22A4A8F4-7468-4DCE-8A82-B2453E7286E0}"/>
-                </a:ext>
-              </a:extLst>
-            </p:cNvPr>
-            <p:cNvCxnSpPr/>
-            <p:nvPr/>
-          </p:nvCxnSpPr>
-          <p:spPr bwMode="auto">
-            <a:xfrm flipH="1">
-              <a:off x="3619500" y="3505200"/>
-              <a:ext cx="1905000" cy="0"/>
-            </a:xfrm>
-            <a:prstGeom prst="line">
-              <a:avLst/>
-            </a:prstGeom>
-            <a:ln w="47625">
-              <a:headEnd type="none" w="med" len="med"/>
-              <a:tailEnd type="none" w="med" len="med"/>
-            </a:ln>
-          </p:spPr>
-          <p:style>
-            <a:lnRef idx="1">
-              <a:schemeClr val="dk1"/>
-            </a:lnRef>
-            <a:fillRef idx="0">
-              <a:schemeClr val="dk1"/>
-            </a:fillRef>
-            <a:effectRef idx="0">
-              <a:schemeClr val="dk1"/>
-            </a:effectRef>
-            <a:fontRef idx="minor">
-              <a:schemeClr val="tx1"/>
-            </a:fontRef>
-          </p:style>
-        </p:cxnSp>
-        <p:cxnSp>
-          <p:nvCxnSpPr>
-            <p:cNvPr id="11" name="Straight Connector 10">
-              <a:extLst>
-                <a:ext uri="{FF2B5EF4-FFF2-40B4-BE49-F238E27FC236}">
-                  <a16:creationId xmlns:a16="http://schemas.microsoft.com/office/drawing/2014/main" id="{1C63D93A-BF57-4761-A56B-B70560BC75BB}"/>
-                </a:ext>
-              </a:extLst>
-            </p:cNvPr>
-            <p:cNvCxnSpPr/>
-            <p:nvPr/>
-          </p:nvCxnSpPr>
-          <p:spPr bwMode="auto">
-            <a:xfrm flipH="1" flipV="1">
-              <a:off x="3505200" y="3708400"/>
-              <a:ext cx="838200" cy="1016000"/>
-            </a:xfrm>
-            <a:prstGeom prst="line">
-              <a:avLst/>
-            </a:prstGeom>
-            <a:ln w="47625">
-              <a:headEnd type="none" w="med" len="med"/>
-              <a:tailEnd type="none" w="med" len="med"/>
-            </a:ln>
-          </p:spPr>
-          <p:style>
-            <a:lnRef idx="1">
-              <a:schemeClr val="dk1"/>
-            </a:lnRef>
-            <a:fillRef idx="0">
-              <a:schemeClr val="dk1"/>
-            </a:fillRef>
-            <a:effectRef idx="0">
-              <a:schemeClr val="dk1"/>
-            </a:effectRef>
-            <a:fontRef idx="minor">
-              <a:schemeClr val="tx1"/>
-            </a:fontRef>
-          </p:style>
-        </p:cxnSp>
-        <p:cxnSp>
-          <p:nvCxnSpPr>
-            <p:cNvPr id="12" name="Straight Connector 11">
-              <a:extLst>
-                <a:ext uri="{FF2B5EF4-FFF2-40B4-BE49-F238E27FC236}">
-                  <a16:creationId xmlns:a16="http://schemas.microsoft.com/office/drawing/2014/main" id="{AD212FE9-44D0-4101-A521-537C3FBA66E7}"/>
-                </a:ext>
-              </a:extLst>
-            </p:cNvPr>
-            <p:cNvCxnSpPr/>
-            <p:nvPr/>
-          </p:nvCxnSpPr>
-          <p:spPr bwMode="auto">
-            <a:xfrm flipH="1" flipV="1">
-              <a:off x="7239000" y="2247900"/>
-              <a:ext cx="838200" cy="1016000"/>
-            </a:xfrm>
-            <a:prstGeom prst="line">
-              <a:avLst/>
-            </a:prstGeom>
-            <a:ln w="47625">
-              <a:headEnd type="none" w="med" len="med"/>
-              <a:tailEnd type="none" w="med" len="med"/>
-            </a:ln>
-          </p:spPr>
-          <p:style>
-            <a:lnRef idx="1">
-              <a:schemeClr val="dk1"/>
-            </a:lnRef>
-            <a:fillRef idx="0">
-              <a:schemeClr val="dk1"/>
-            </a:fillRef>
-            <a:effectRef idx="0">
-              <a:schemeClr val="dk1"/>
-            </a:effectRef>
-            <a:fontRef idx="minor">
-              <a:schemeClr val="tx1"/>
-            </a:fontRef>
-          </p:style>
-        </p:cxnSp>
-        <p:cxnSp>
-          <p:nvCxnSpPr>
-            <p:cNvPr id="13" name="Straight Connector 12">
-              <a:extLst>
-                <a:ext uri="{FF2B5EF4-FFF2-40B4-BE49-F238E27FC236}">
-                  <a16:creationId xmlns:a16="http://schemas.microsoft.com/office/drawing/2014/main" id="{FEF2A7D4-C217-4C5F-8A56-D4630F958851}"/>
-                </a:ext>
-              </a:extLst>
-            </p:cNvPr>
-            <p:cNvCxnSpPr/>
-            <p:nvPr/>
-          </p:nvCxnSpPr>
-          <p:spPr bwMode="auto">
-            <a:xfrm flipH="1">
-              <a:off x="2362200" y="2057400"/>
-              <a:ext cx="4419600" cy="0"/>
-            </a:xfrm>
-            <a:prstGeom prst="line">
-              <a:avLst/>
-            </a:prstGeom>
-            <a:ln w="47625">
-              <a:headEnd type="none" w="med" len="med"/>
-              <a:tailEnd type="none" w="med" len="med"/>
-            </a:ln>
-          </p:spPr>
-          <p:style>
-            <a:lnRef idx="1">
-              <a:schemeClr val="dk1"/>
-            </a:lnRef>
-            <a:fillRef idx="0">
-              <a:schemeClr val="dk1"/>
-            </a:fillRef>
-            <a:effectRef idx="0">
-              <a:schemeClr val="dk1"/>
-            </a:effectRef>
-            <a:fontRef idx="minor">
-              <a:schemeClr val="tx1"/>
-            </a:fontRef>
-          </p:style>
-        </p:cxnSp>
-      </p:grpSp>
-    </p:spTree>
-    <p:extLst>
-      <p:ext uri="{BB962C8B-B14F-4D97-AF65-F5344CB8AC3E}">
-        <p14:creationId xmlns:p14="http://schemas.microsoft.com/office/powerpoint/2010/main" val="1366709241"/>
-      </p:ext>
-    </p:extLst>
-  </p:cSld>
-  <p:clrMapOvr>
-    <a:masterClrMapping/>
-  </p:clrMapOvr>
-  <p:timing>
-    <p:tnLst>
-      <p:par>
-        <p:cTn id="1" dur="indefinite" restart="never" nodeType="tmRoot">
-          <p:childTnLst>
-            <p:seq concurrent="1" nextAc="seek">
-              <p:cTn id="2" dur="indefinite" nodeType="mainSeq">
-                <p:childTnLst>
-                  <p:par>
-                    <p:cTn id="3" fill="hold">
-                      <p:stCondLst>
-                        <p:cond delay="indefinite"/>
-                      </p:stCondLst>
-                      <p:childTnLst>
-                        <p:par>
-                          <p:cTn id="4" fill="hold">
-                            <p:stCondLst>
-                              <p:cond delay="0"/>
-                            </p:stCondLst>
-                            <p:childTnLst>
-                              <p:par>
-                                <p:cTn id="5" presetID="1" presetClass="entr" presetSubtype="0" fill="hold" nodeType="clickEffect">
-                                  <p:stCondLst>
-                                    <p:cond delay="0"/>
-                                  </p:stCondLst>
-                                  <p:childTnLst>
-                                    <p:set>
-                                      <p:cBhvr>
-                                        <p:cTn id="6" dur="1" fill="hold">
-                                          <p:stCondLst>
-                                            <p:cond delay="0"/>
-                                          </p:stCondLst>
-                                        </p:cTn>
-                                        <p:tgtEl>
-                                          <p:spTgt spid="5"/>
-                                        </p:tgtEl>
-                                        <p:attrNameLst>
-                                          <p:attrName>style.visibility</p:attrName>
-                                        </p:attrNameLst>
-                                      </p:cBhvr>
-                                      <p:to>
-                                        <p:strVal val="visible"/>
-                                      </p:to>
-                                    </p:set>
-                                  </p:childTnLst>
-                                </p:cTn>
-                              </p:par>
-                            </p:childTnLst>
-                          </p:cTn>
-                        </p:par>
-                      </p:childTnLst>
-                    </p:cTn>
-                  </p:par>
-                </p:childTnLst>
-              </p:cTn>
-              <p:prevCondLst>
-                <p:cond evt="onPrev" delay="0">
-                  <p:tgtEl>
-                    <p:sldTgt/>
-                  </p:tgtEl>
-                </p:cond>
-              </p:prevCondLst>
-              <p:nextCondLst>
-                <p:cond evt="onNext" delay="0">
-                  <p:tgtEl>
-                    <p:sldTgt/>
-                  </p:tgtEl>
-                </p:cond>
-              </p:nextCondLst>
-            </p:seq>
-          </p:childTnLst>
-        </p:cTn>
-      </p:par>
-    </p:tnLst>
-  </p:timing>
 </p:sld>
 </file>
 
